--- a/.shared/outputs/marketer/seeneyu-pitch-deck.pptx
+++ b/.shared/outputs/marketer/seeneyu-pitch-deck.pptx
@@ -4,6 +4,9 @@
   <p:sldMasterIdLst>
     <p:sldMasterId id="2147483648" r:id="rId1"/>
   </p:sldMasterIdLst>
+  <p:notesMasterIdLst>
+    <p:notesMasterId r:id="rId16"/>
+  </p:notesMasterIdLst>
   <p:sldIdLst>
     <p:sldId id="256" r:id="rId2"/>
     <p:sldId id="257" r:id="rId3"/>
@@ -20,9 +23,6 @@
     <p:sldId id="268" r:id="rId14"/>
     <p:sldId id="269" r:id="rId15"/>
   </p:sldIdLst>
-  <p:notesMasterIdLst>
-    <p:notesMasterId r:id="rId16"/>
-  </p:notesMasterIdLst>
   <p:sldSz cx="12192000" cy="6858000"/>
   <p:notesSz cx="6858000" cy="12192000"/>
   <p:defaultTextStyle>
@@ -117,6 +117,11 @@
       </a:defRPr>
     </a:lvl9pPr>
   </p:defaultTextStyle>
+  <p:extLst>
+    <p:ext uri="{EFAFB233-063F-42B5-8137-9DF3F51BA10A}">
+      <p15:sldGuideLst xmlns:p15="http://schemas.microsoft.com/office/powerpoint/2012/main"/>
+    </p:ext>
+  </p:extLst>
 </p:presentation>
 </file>
 
@@ -142,234 +147,10 @@
           <a:chExt cx="0" cy="0"/>
         </a:xfrm>
       </p:grpSpPr>
-      <p:sp>
-        <p:nvSpPr>
-          <p:cNvPr id="2" name="Header Placeholder 1"/>
-          <p:cNvSpPr>
-            <a:spLocks noGrp="1"/>
-          </p:cNvSpPr>
-          <p:nvPr>
-            <p:ph type="hdr" sz="quarter"/>
-          </p:nvPr>
-        </p:nvSpPr>
-        <p:spPr>
-          <a:xfrm>
-            <a:off x="0" y="0"/>
-            <a:ext cx="2971800" cy="458788"/>
-          </a:xfrm>
-          <a:prstGeom prst="rect">
-            <a:avLst/>
-          </a:prstGeom>
-        </p:spPr>
-        <p:txBody>
-          <a:bodyPr vert="horz" lIns="91440" tIns="45720" rIns="91440" bIns="45720" rtlCol="0"/>
-          <a:lstStyle>
-            <a:lvl1pPr algn="l">
-              <a:defRPr sz="1200"/>
-            </a:lvl1pPr>
-          </a:lstStyle>
-          <a:p>
-            <a:endParaRPr lang="en-US"/>
-          </a:p>
-        </p:txBody>
-      </p:sp>
-      <p:sp>
-        <p:nvSpPr>
-          <p:cNvPr id="3" name="Date Placeholder 2"/>
-          <p:cNvSpPr>
-            <a:spLocks noGrp="1"/>
-          </p:cNvSpPr>
-          <p:nvPr>
-            <p:ph type="dt" idx="1"/>
-          </p:nvPr>
-        </p:nvSpPr>
-        <p:spPr>
-          <a:xfrm>
-            <a:off x="3884613" y="0"/>
-            <a:ext cx="2971800" cy="458788"/>
-          </a:xfrm>
-          <a:prstGeom prst="rect">
-            <a:avLst/>
-          </a:prstGeom>
-        </p:spPr>
-        <p:txBody>
-          <a:bodyPr vert="horz" lIns="91440" tIns="45720" rIns="91440" bIns="45720" rtlCol="0"/>
-          <a:lstStyle>
-            <a:lvl1pPr algn="r">
-              <a:defRPr sz="1200"/>
-            </a:lvl1pPr>
-          </a:lstStyle>
-          <a:p>
-            <a:fld id="{5282F153-3F37-0F45-9E97-73ACFA13230C}" type="datetimeFigureOut">
-              <a:rPr lang="en-US"/>
-              <a:t>7/23/19</a:t>
-            </a:fld>
-            <a:endParaRPr lang="en-US"/>
-          </a:p>
-        </p:txBody>
-      </p:sp>
-      <p:sp>
-        <p:nvSpPr>
-          <p:cNvPr id="4" name="Slide Image Placeholder 3"/>
-          <p:cNvSpPr>
-            <a:spLocks noGrp="1" noRot="1" noChangeAspect="1"/>
-          </p:cNvSpPr>
-          <p:nvPr>
-            <p:ph type="sldImg" idx="2"/>
-          </p:nvPr>
-        </p:nvSpPr>
-        <p:spPr>
-          <a:xfrm>
-            <a:off x="685800" y="1143000"/>
-            <a:ext cx="5486400" cy="3086100"/>
-          </a:xfrm>
-          <a:prstGeom prst="rect">
-            <a:avLst/>
-          </a:prstGeom>
-          <a:noFill/>
-          <a:ln w="12700">
-            <a:solidFill>
-              <a:prstClr val="black"/>
-            </a:solidFill>
-          </a:ln>
-        </p:spPr>
-        <p:txBody>
-          <a:bodyPr vert="horz" lIns="91440" tIns="45720" rIns="91440" bIns="45720" rtlCol="0" anchor="ctr"/>
-          <a:lstStyle/>
-          <a:p>
-            <a:endParaRPr lang="en-US"/>
-          </a:p>
-        </p:txBody>
-      </p:sp>
-      <p:sp>
-        <p:nvSpPr>
-          <p:cNvPr id="5" name="Notes Placeholder 4"/>
-          <p:cNvSpPr>
-            <a:spLocks noGrp="1"/>
-          </p:cNvSpPr>
-          <p:nvPr>
-            <p:ph type="body" sz="quarter" idx="3"/>
-          </p:nvPr>
-        </p:nvSpPr>
-        <p:spPr>
-          <a:xfrm>
-            <a:off x="685800" y="4400550"/>
-            <a:ext cx="5486400" cy="3600450"/>
-          </a:xfrm>
-          <a:prstGeom prst="rect">
-            <a:avLst/>
-          </a:prstGeom>
-        </p:spPr>
-        <p:txBody>
-          <a:bodyPr vert="horz" lIns="91440" tIns="45720" rIns="91440" bIns="45720" rtlCol="0"/>
-          <a:lstStyle/>
-          <a:p>
-            <a:pPr lvl="0"/>
-            <a:r>
-              <a:rPr lang="en-US"/>
-              <a:t>Click to edit Master text styles</a:t>
-            </a:r>
-          </a:p>
-          <a:p>
-            <a:pPr lvl="1"/>
-            <a:r>
-              <a:rPr lang="en-US"/>
-              <a:t>Second level</a:t>
-            </a:r>
-          </a:p>
-          <a:p>
-            <a:pPr lvl="2"/>
-            <a:r>
-              <a:rPr lang="en-US"/>
-              <a:t>Third level</a:t>
-            </a:r>
-          </a:p>
-          <a:p>
-            <a:pPr lvl="3"/>
-            <a:r>
-              <a:rPr lang="en-US"/>
-              <a:t>Fourth level</a:t>
-            </a:r>
-          </a:p>
-          <a:p>
-            <a:pPr lvl="4"/>
-            <a:r>
-              <a:rPr lang="en-US"/>
-              <a:t>Fifth level</a:t>
-            </a:r>
-          </a:p>
-        </p:txBody>
-      </p:sp>
-      <p:sp>
-        <p:nvSpPr>
-          <p:cNvPr id="6" name="Footer Placeholder 5"/>
-          <p:cNvSpPr>
-            <a:spLocks noGrp="1"/>
-          </p:cNvSpPr>
-          <p:nvPr>
-            <p:ph type="ftr" sz="quarter" idx="4"/>
-          </p:nvPr>
-        </p:nvSpPr>
-        <p:spPr>
-          <a:xfrm>
-            <a:off x="0" y="8685213"/>
-            <a:ext cx="2971800" cy="458787"/>
-          </a:xfrm>
-          <a:prstGeom prst="rect">
-            <a:avLst/>
-          </a:prstGeom>
-        </p:spPr>
-        <p:txBody>
-          <a:bodyPr vert="horz" lIns="91440" tIns="45720" rIns="91440" bIns="45720" rtlCol="0" anchor="b"/>
-          <a:lstStyle>
-            <a:lvl1pPr algn="l">
-              <a:defRPr sz="1200"/>
-            </a:lvl1pPr>
-          </a:lstStyle>
-          <a:p>
-            <a:endParaRPr lang="en-US"/>
-          </a:p>
-        </p:txBody>
-      </p:sp>
-      <p:sp>
-        <p:nvSpPr>
-          <p:cNvPr id="7" name="Slide Number Placeholder 6"/>
-          <p:cNvSpPr>
-            <a:spLocks noGrp="1"/>
-          </p:cNvSpPr>
-          <p:nvPr>
-            <p:ph type="sldNum" sz="quarter" idx="5"/>
-          </p:nvPr>
-        </p:nvSpPr>
-        <p:spPr>
-          <a:xfrm>
-            <a:off x="3884613" y="8685213"/>
-            <a:ext cx="2971800" cy="458787"/>
-          </a:xfrm>
-          <a:prstGeom prst="rect">
-            <a:avLst/>
-          </a:prstGeom>
-        </p:spPr>
-        <p:txBody>
-          <a:bodyPr vert="horz" lIns="91440" tIns="45720" rIns="91440" bIns="45720" rtlCol="0" anchor="b"/>
-          <a:lstStyle>
-            <a:lvl1pPr algn="r">
-              <a:defRPr sz="1200"/>
-            </a:lvl1pPr>
-          </a:lstStyle>
-          <a:p>
-            <a:fld id="{CE5E9CC1-C706-0F49-92D6-E571CC5EEA8F}" type="slidenum">
-              <a:rPr lang="en-US"/>
-              <a:t>‹#›</a:t>
-            </a:fld>
-            <a:endParaRPr lang="en-US"/>
-          </a:p>
-        </p:txBody>
-      </p:sp>
     </p:spTree>
     <p:extLst>
       <p:ext uri="{BB962C8B-B14F-4D97-AF65-F5344CB8AC3E}">
-        <p14:creationId xmlns:p14="http://schemas.microsoft.com/office/powerpoint/2010/main" val="1024086991"/>
+        <p14:creationId xmlns:p14="http://schemas.microsoft.com/office/powerpoint/2010/main" val="906573597"/>
       </p:ext>
     </p:extLst>
   </p:cSld>
@@ -513,10 +294,6 @@
           <a:bodyPr/>
           <a:lstStyle/>
           <a:p>
-            <a:r>
-              <a:rPr lang="en-US" dirty="0"/>
-              <a:t/>
-            </a:r>
             <a:endParaRPr lang="en-US" dirty="0"/>
           </a:p>
         </p:txBody>
@@ -601,10 +378,6 @@
           <a:bodyPr/>
           <a:lstStyle/>
           <a:p>
-            <a:r>
-              <a:rPr lang="en-US" dirty="0"/>
-              <a:t/>
-            </a:r>
             <a:endParaRPr lang="en-US" dirty="0"/>
           </a:p>
         </p:txBody>
@@ -689,10 +462,6 @@
           <a:bodyPr/>
           <a:lstStyle/>
           <a:p>
-            <a:r>
-              <a:rPr lang="en-US" dirty="0"/>
-              <a:t/>
-            </a:r>
             <a:endParaRPr lang="en-US" dirty="0"/>
           </a:p>
         </p:txBody>
@@ -777,10 +546,6 @@
           <a:bodyPr/>
           <a:lstStyle/>
           <a:p>
-            <a:r>
-              <a:rPr lang="en-US" dirty="0"/>
-              <a:t/>
-            </a:r>
             <a:endParaRPr lang="en-US" dirty="0"/>
           </a:p>
         </p:txBody>
@@ -865,10 +630,6 @@
           <a:bodyPr/>
           <a:lstStyle/>
           <a:p>
-            <a:r>
-              <a:rPr lang="en-US" dirty="0"/>
-              <a:t/>
-            </a:r>
             <a:endParaRPr lang="en-US" dirty="0"/>
           </a:p>
         </p:txBody>
@@ -953,10 +714,6 @@
           <a:bodyPr/>
           <a:lstStyle/>
           <a:p>
-            <a:r>
-              <a:rPr lang="en-US" dirty="0"/>
-              <a:t/>
-            </a:r>
             <a:endParaRPr lang="en-US" dirty="0"/>
           </a:p>
         </p:txBody>
@@ -1041,10 +798,6 @@
           <a:bodyPr/>
           <a:lstStyle/>
           <a:p>
-            <a:r>
-              <a:rPr lang="en-US" dirty="0"/>
-              <a:t/>
-            </a:r>
             <a:endParaRPr lang="en-US" dirty="0"/>
           </a:p>
         </p:txBody>
@@ -1129,10 +882,6 @@
           <a:bodyPr/>
           <a:lstStyle/>
           <a:p>
-            <a:r>
-              <a:rPr lang="en-US" dirty="0"/>
-              <a:t/>
-            </a:r>
             <a:endParaRPr lang="en-US" dirty="0"/>
           </a:p>
         </p:txBody>
@@ -1217,10 +966,6 @@
           <a:bodyPr/>
           <a:lstStyle/>
           <a:p>
-            <a:r>
-              <a:rPr lang="en-US" dirty="0"/>
-              <a:t/>
-            </a:r>
             <a:endParaRPr lang="en-US" dirty="0"/>
           </a:p>
         </p:txBody>
@@ -1305,10 +1050,6 @@
           <a:bodyPr/>
           <a:lstStyle/>
           <a:p>
-            <a:r>
-              <a:rPr lang="en-US" dirty="0"/>
-              <a:t/>
-            </a:r>
             <a:endParaRPr lang="en-US" dirty="0"/>
           </a:p>
         </p:txBody>
@@ -1393,10 +1134,6 @@
           <a:bodyPr/>
           <a:lstStyle/>
           <a:p>
-            <a:r>
-              <a:rPr lang="en-US" dirty="0"/>
-              <a:t/>
-            </a:r>
             <a:endParaRPr lang="en-US" dirty="0"/>
           </a:p>
         </p:txBody>
@@ -1481,10 +1218,6 @@
           <a:bodyPr/>
           <a:lstStyle/>
           <a:p>
-            <a:r>
-              <a:rPr lang="en-US" dirty="0"/>
-              <a:t/>
-            </a:r>
             <a:endParaRPr lang="en-US" dirty="0"/>
           </a:p>
         </p:txBody>
@@ -1569,10 +1302,6 @@
           <a:bodyPr/>
           <a:lstStyle/>
           <a:p>
-            <a:r>
-              <a:rPr lang="en-US" dirty="0"/>
-              <a:t/>
-            </a:r>
             <a:endParaRPr lang="en-US" dirty="0"/>
           </a:p>
         </p:txBody>
@@ -1657,10 +1386,6 @@
           <a:bodyPr/>
           <a:lstStyle/>
           <a:p>
-            <a:r>
-              <a:rPr lang="en-US" dirty="0"/>
-              <a:t/>
-            </a:r>
             <a:endParaRPr lang="en-US" dirty="0"/>
           </a:p>
         </p:txBody>
@@ -1734,6 +1459,11 @@
 <file path=ppt/slideMasters/slideMaster1.xml><?xml version="1.0" encoding="utf-8"?>
 <p:sldMaster xmlns:a="http://schemas.openxmlformats.org/drawingml/2006/main" xmlns:r="http://schemas.openxmlformats.org/officeDocument/2006/relationships" xmlns:p="http://schemas.openxmlformats.org/presentationml/2006/main">
   <p:cSld>
+    <p:bg>
+      <p:bgRef idx="1001">
+        <a:schemeClr val="bg1"/>
+      </p:bgRef>
+    </p:bg>
     <p:spTree>
       <p:nvGrpSpPr>
         <p:cNvPr id="1" name=""/>
@@ -2016,6 +1746,7 @@
         <a:solidFill>
           <a:srgbClr val="0D0D14"/>
         </a:solidFill>
+        <a:effectLst/>
       </p:bgPr>
     </p:bg>
     <p:spTree>
@@ -2053,7 +1784,7 @@
           <a:bodyPr wrap="square" rtlCol="0" anchor="ctr"/>
           <a:lstStyle/>
           <a:p>
-            <a:pPr indent="0" marL="0">
+            <a:pPr marL="0" indent="0">
               <a:buNone/>
             </a:pPr>
             <a:r>
@@ -2092,7 +1823,7 @@
           <a:bodyPr wrap="square" rtlCol="0" anchor="ctr"/>
           <a:lstStyle/>
           <a:p>
-            <a:pPr indent="0" marL="0">
+            <a:pPr marL="0" indent="0">
               <a:buNone/>
             </a:pPr>
             <a:r>
@@ -2131,7 +1862,7 @@
           <a:bodyPr wrap="square" rtlCol="0" anchor="ctr"/>
           <a:lstStyle/>
           <a:p>
-            <a:pPr indent="0" marL="0">
+            <a:pPr marL="0" indent="0">
               <a:buNone/>
             </a:pPr>
             <a:r>
@@ -2170,7 +1901,7 @@
           <a:bodyPr wrap="square" rtlCol="0" anchor="ctr"/>
           <a:lstStyle/>
           <a:p>
-            <a:pPr indent="0" marL="0">
+            <a:pPr marL="0" indent="0">
               <a:buNone/>
             </a:pPr>
             <a:r>
@@ -2209,7 +1940,7 @@
           <a:bodyPr wrap="square" rtlCol="0" anchor="ctr"/>
           <a:lstStyle/>
           <a:p>
-            <a:pPr indent="0" marL="0">
+            <a:pPr marL="0" indent="0">
               <a:buNone/>
             </a:pPr>
             <a:r>
@@ -2248,7 +1979,7 @@
           <a:bodyPr wrap="square" rtlCol="0" anchor="ctr"/>
           <a:lstStyle/>
           <a:p>
-            <a:pPr indent="0" marL="0">
+            <a:pPr marL="0" indent="0">
               <a:buNone/>
             </a:pPr>
             <a:r>
@@ -2282,6 +2013,7 @@
         <a:solidFill>
           <a:srgbClr val="0D0D14"/>
         </a:solidFill>
+        <a:effectLst/>
       </p:bgPr>
     </p:bg>
     <p:spTree>
@@ -2319,7 +2051,7 @@
           <a:bodyPr wrap="square" rtlCol="0" anchor="ctr"/>
           <a:lstStyle/>
           <a:p>
-            <a:pPr indent="0" marL="0">
+            <a:pPr marL="0" indent="0">
               <a:buNone/>
             </a:pPr>
             <a:r>
@@ -2378,7 +2110,7 @@
           <a:bodyPr wrap="square" rtlCol="0" anchor="ctr"/>
           <a:lstStyle/>
           <a:p>
-            <a:pPr algn="r" indent="0" marL="0">
+            <a:pPr marL="0" indent="0" algn="r">
               <a:buNone/>
             </a:pPr>
             <a:r>
@@ -2417,7 +2149,7 @@
           <a:bodyPr wrap="square" rtlCol="0" anchor="ctr"/>
           <a:lstStyle/>
           <a:p>
-            <a:pPr indent="0" marL="0">
+            <a:pPr marL="0" indent="0">
               <a:buNone/>
             </a:pPr>
             <a:r>
@@ -2483,7 +2215,7 @@
           <a:bodyPr wrap="square" rtlCol="0" anchor="ctr"/>
           <a:lstStyle/>
           <a:p>
-            <a:pPr indent="0" marL="0">
+            <a:pPr marL="0" indent="0">
               <a:buNone/>
             </a:pPr>
             <a:r>
@@ -2522,7 +2254,7 @@
           <a:bodyPr wrap="square" rtlCol="0" anchor="ctr"/>
           <a:lstStyle/>
           <a:p>
-            <a:pPr indent="0" marL="0">
+            <a:pPr marL="0" indent="0">
               <a:buNone/>
             </a:pPr>
             <a:r>
@@ -2588,7 +2320,7 @@
           <a:bodyPr wrap="square" rtlCol="0" anchor="ctr"/>
           <a:lstStyle/>
           <a:p>
-            <a:pPr indent="0" marL="0">
+            <a:pPr marL="0" indent="0">
               <a:buNone/>
             </a:pPr>
             <a:r>
@@ -2627,7 +2359,7 @@
           <a:bodyPr wrap="square" rtlCol="0" anchor="ctr"/>
           <a:lstStyle/>
           <a:p>
-            <a:pPr indent="0" marL="0">
+            <a:pPr marL="0" indent="0">
               <a:buNone/>
             </a:pPr>
             <a:r>
@@ -2693,7 +2425,7 @@
           <a:bodyPr wrap="square" rtlCol="0" anchor="ctr"/>
           <a:lstStyle/>
           <a:p>
-            <a:pPr indent="0" marL="0">
+            <a:pPr marL="0" indent="0">
               <a:buNone/>
             </a:pPr>
             <a:r>
@@ -2732,7 +2464,7 @@
           <a:bodyPr wrap="square" rtlCol="0" anchor="ctr"/>
           <a:lstStyle/>
           <a:p>
-            <a:pPr indent="0" marL="0">
+            <a:pPr marL="0" indent="0">
               <a:buNone/>
             </a:pPr>
             <a:r>
@@ -2798,7 +2530,7 @@
           <a:bodyPr wrap="square" rtlCol="0" anchor="ctr"/>
           <a:lstStyle/>
           <a:p>
-            <a:pPr indent="0" marL="0">
+            <a:pPr marL="0" indent="0">
               <a:buNone/>
             </a:pPr>
             <a:r>
@@ -2837,7 +2569,7 @@
           <a:bodyPr wrap="square" rtlCol="0" anchor="ctr"/>
           <a:lstStyle/>
           <a:p>
-            <a:pPr indent="0" marL="0">
+            <a:pPr marL="0" indent="0">
               <a:buNone/>
             </a:pPr>
             <a:r>
@@ -2876,7 +2608,7 @@
           <a:bodyPr wrap="square" rtlCol="0" anchor="ctr"/>
           <a:lstStyle/>
           <a:p>
-            <a:pPr indent="0" marL="0">
+            <a:pPr marL="0" indent="0">
               <a:buNone/>
             </a:pPr>
             <a:r>
@@ -2915,7 +2647,7 @@
           <a:bodyPr wrap="square" rtlCol="0" anchor="ctr"/>
           <a:lstStyle/>
           <a:p>
-            <a:pPr algn="ctr" indent="0" marL="0">
+            <a:pPr marL="0" indent="0" algn="ctr">
               <a:buNone/>
             </a:pPr>
             <a:r>
@@ -2954,7 +2686,7 @@
           <a:bodyPr wrap="square" rtlCol="0" anchor="ctr"/>
           <a:lstStyle/>
           <a:p>
-            <a:pPr indent="0" marL="0">
+            <a:pPr marL="0" indent="0">
               <a:buNone/>
             </a:pPr>
             <a:r>
@@ -2971,7 +2703,7 @@
             <a:endParaRPr lang="en-US" sz="1100" dirty="0"/>
           </a:p>
           <a:p>
-            <a:pPr indent="0" marL="0">
+            <a:pPr marL="0" indent="0">
               <a:buNone/>
             </a:pPr>
             <a:r>
@@ -3005,6 +2737,7 @@
         <a:solidFill>
           <a:srgbClr val="0D0D14"/>
         </a:solidFill>
+        <a:effectLst/>
       </p:bgPr>
     </p:bg>
     <p:spTree>
@@ -3042,7 +2775,7 @@
           <a:bodyPr wrap="square" rtlCol="0" anchor="ctr"/>
           <a:lstStyle/>
           <a:p>
-            <a:pPr indent="0" marL="0">
+            <a:pPr marL="0" indent="0">
               <a:buNone/>
             </a:pPr>
             <a:r>
@@ -3101,7 +2834,7 @@
           <a:bodyPr wrap="square" rtlCol="0" anchor="ctr"/>
           <a:lstStyle/>
           <a:p>
-            <a:pPr algn="r" indent="0" marL="0">
+            <a:pPr marL="0" indent="0" algn="r">
               <a:buNone/>
             </a:pPr>
             <a:r>
@@ -3140,7 +2873,7 @@
           <a:bodyPr wrap="square" rtlCol="0" anchor="ctr"/>
           <a:lstStyle/>
           <a:p>
-            <a:pPr indent="0" marL="0">
+            <a:pPr marL="0" indent="0">
               <a:buNone/>
             </a:pPr>
             <a:r>
@@ -3231,7 +2964,7 @@
           <a:bodyPr wrap="square" rtlCol="0" anchor="ctr"/>
           <a:lstStyle/>
           <a:p>
-            <a:pPr algn="ctr" indent="0" marL="0">
+            <a:pPr marL="0" indent="0" algn="ctr">
               <a:buNone/>
             </a:pPr>
             <a:r>
@@ -3270,7 +3003,7 @@
           <a:bodyPr wrap="square" rtlCol="0" anchor="ctr"/>
           <a:lstStyle/>
           <a:p>
-            <a:pPr indent="0" marL="0">
+            <a:pPr marL="0" indent="0">
               <a:buNone/>
             </a:pPr>
             <a:r>
@@ -3309,7 +3042,7 @@
           <a:bodyPr wrap="square" rtlCol="0" anchor="ctr"/>
           <a:lstStyle/>
           <a:p>
-            <a:pPr indent="0" marL="0">
+            <a:pPr marL="0" indent="0">
               <a:buNone/>
             </a:pPr>
             <a:r>
@@ -3348,7 +3081,7 @@
           <a:bodyPr wrap="square" rtlCol="0" anchor="ctr"/>
           <a:lstStyle/>
           <a:p>
-            <a:pPr indent="0" marL="0">
+            <a:pPr marL="0" indent="0">
               <a:lnSpc>
                 <a:spcPct val="130000"/>
               </a:lnSpc>
@@ -3368,7 +3101,7 @@
             <a:endParaRPr lang="en-US" sz="1200" dirty="0"/>
           </a:p>
           <a:p>
-            <a:pPr indent="0" marL="0">
+            <a:pPr marL="0" indent="0">
               <a:lnSpc>
                 <a:spcPct val="130000"/>
               </a:lnSpc>
@@ -3410,7 +3143,7 @@
           <a:bodyPr wrap="square" rtlCol="0" anchor="ctr"/>
           <a:lstStyle/>
           <a:p>
-            <a:pPr indent="0" marL="0">
+            <a:pPr marL="0" indent="0">
               <a:buNone/>
             </a:pPr>
             <a:r>
@@ -3598,6 +3331,7 @@
         <a:solidFill>
           <a:srgbClr val="0D0D14"/>
         </a:solidFill>
+        <a:effectLst/>
       </p:bgPr>
     </p:bg>
     <p:spTree>
@@ -3635,7 +3369,7 @@
           <a:bodyPr wrap="square" rtlCol="0" anchor="ctr"/>
           <a:lstStyle/>
           <a:p>
-            <a:pPr indent="0" marL="0">
+            <a:pPr marL="0" indent="0">
               <a:buNone/>
             </a:pPr>
             <a:r>
@@ -3694,7 +3428,7 @@
           <a:bodyPr wrap="square" rtlCol="0" anchor="ctr"/>
           <a:lstStyle/>
           <a:p>
-            <a:pPr algn="r" indent="0" marL="0">
+            <a:pPr marL="0" indent="0" algn="r">
               <a:buNone/>
             </a:pPr>
             <a:r>
@@ -3728,17 +3462,41 @@
         </p:nvGraphicFramePr>
         <p:xfrm>
           <a:off x="1371600" y="1645920"/>
-          <a:ext cx="9144000" cy="4114800"/>
+          <a:ext cx="9144000" cy="3520440"/>
         </p:xfrm>
         <a:graphic>
           <a:graphicData uri="http://schemas.openxmlformats.org/drawingml/2006/table">
             <a:tbl>
               <a:tblPr/>
               <a:tblGrid>
-                <a:gridCol w="2743200"/>
-                <a:gridCol w="2103120"/>
-                <a:gridCol w="2103120"/>
-                <a:gridCol w="2194560"/>
+                <a:gridCol w="2743200">
+                  <a:extLst>
+                    <a:ext uri="{9D8B030D-6E8A-4147-A177-3AD203B41FA5}">
+                      <a16:colId xmlns:a16="http://schemas.microsoft.com/office/drawing/2014/main" val="20000"/>
+                    </a:ext>
+                  </a:extLst>
+                </a:gridCol>
+                <a:gridCol w="2103120">
+                  <a:extLst>
+                    <a:ext uri="{9D8B030D-6E8A-4147-A177-3AD203B41FA5}">
+                      <a16:colId xmlns:a16="http://schemas.microsoft.com/office/drawing/2014/main" val="20001"/>
+                    </a:ext>
+                  </a:extLst>
+                </a:gridCol>
+                <a:gridCol w="2103120">
+                  <a:extLst>
+                    <a:ext uri="{9D8B030D-6E8A-4147-A177-3AD203B41FA5}">
+                      <a16:colId xmlns:a16="http://schemas.microsoft.com/office/drawing/2014/main" val="20002"/>
+                    </a:ext>
+                  </a:extLst>
+                </a:gridCol>
+                <a:gridCol w="2194560">
+                  <a:extLst>
+                    <a:ext uri="{9D8B030D-6E8A-4147-A177-3AD203B41FA5}">
+                      <a16:colId xmlns:a16="http://schemas.microsoft.com/office/drawing/2014/main" val="20003"/>
+                    </a:ext>
+                  </a:extLst>
+                </a:gridCol>
               </a:tblGrid>
               <a:tr h="457200">
                 <a:tc>
@@ -3746,7 +3504,7 @@
                     <a:bodyPr/>
                     <a:lstStyle/>
                     <a:p>
-                      <a:pPr indent="0" marL="0">
+                      <a:pPr marL="0" indent="0">
                         <a:buNone/>
                       </a:pPr>
                       <a:endParaRPr lang="en-US" sz="1200" dirty="0">
@@ -3756,7 +3514,7 @@
                       </a:endParaRPr>
                     </a:p>
                   </a:txBody>
-                  <a:tcPr marL="91440" marR="91440" marT="45720" marB="45720">
+                  <a:tcPr>
                     <a:lnL w="12700" cap="flat" cmpd="sng" algn="ctr">
                       <a:solidFill>
                         <a:srgbClr val="1C1C2E"/>
@@ -3803,7 +3561,7 @@
                     <a:bodyPr/>
                     <a:lstStyle/>
                     <a:p>
-                      <a:pPr indent="0" marL="0">
+                      <a:pPr marL="0" indent="0">
                         <a:buNone/>
                       </a:pPr>
                       <a:r>
@@ -3824,7 +3582,7 @@
                       </a:endParaRPr>
                     </a:p>
                   </a:txBody>
-                  <a:tcPr marL="91440" marR="91440" marT="45720" marB="45720">
+                  <a:tcPr>
                     <a:lnL w="12700" cap="flat" cmpd="sng" algn="ctr">
                       <a:solidFill>
                         <a:srgbClr val="1C1C2E"/>
@@ -3871,7 +3629,7 @@
                     <a:bodyPr/>
                     <a:lstStyle/>
                     <a:p>
-                      <a:pPr indent="0" marL="0">
+                      <a:pPr marL="0" indent="0">
                         <a:buNone/>
                       </a:pPr>
                       <a:r>
@@ -3892,7 +3650,7 @@
                       </a:endParaRPr>
                     </a:p>
                   </a:txBody>
-                  <a:tcPr marL="91440" marR="91440" marT="45720" marB="45720">
+                  <a:tcPr>
                     <a:lnL w="12700" cap="flat" cmpd="sng" algn="ctr">
                       <a:solidFill>
                         <a:srgbClr val="1C1C2E"/>
@@ -3939,7 +3697,7 @@
                     <a:bodyPr/>
                     <a:lstStyle/>
                     <a:p>
-                      <a:pPr indent="0" marL="0">
+                      <a:pPr marL="0" indent="0">
                         <a:buNone/>
                       </a:pPr>
                       <a:r>
@@ -3960,7 +3718,7 @@
                       </a:endParaRPr>
                     </a:p>
                   </a:txBody>
-                  <a:tcPr marL="91440" marR="91440" marT="45720" marB="45720">
+                  <a:tcPr>
                     <a:lnL w="12700" cap="flat" cmpd="sng" algn="ctr">
                       <a:solidFill>
                         <a:srgbClr val="1C1C2E"/>
@@ -4002,6 +3760,11 @@
                     </a:solidFill>
                   </a:tcPr>
                 </a:tc>
+                <a:extLst>
+                  <a:ext uri="{0D108BD9-81ED-4DB2-BD59-A6C34878D82A}">
+                    <a16:rowId xmlns:a16="http://schemas.microsoft.com/office/drawing/2014/main" val="10000"/>
+                  </a:ext>
+                </a:extLst>
               </a:tr>
               <a:tr h="502920">
                 <a:tc>
@@ -4009,7 +3772,7 @@
                     <a:bodyPr/>
                     <a:lstStyle/>
                     <a:p>
-                      <a:pPr indent="0" marL="0">
+                      <a:pPr marL="0" indent="0">
                         <a:buNone/>
                       </a:pPr>
                       <a:r>
@@ -4030,7 +3793,7 @@
                       </a:endParaRPr>
                     </a:p>
                   </a:txBody>
-                  <a:tcPr marL="91440" marR="91440" marT="45720" marB="45720">
+                  <a:tcPr>
                     <a:lnL w="12700" cap="flat" cmpd="sng" algn="ctr">
                       <a:solidFill>
                         <a:srgbClr val="1C1C2E"/>
@@ -4077,7 +3840,7 @@
                     <a:bodyPr/>
                     <a:lstStyle/>
                     <a:p>
-                      <a:pPr indent="0" marL="0">
+                      <a:pPr marL="0" indent="0">
                         <a:buNone/>
                       </a:pPr>
                       <a:r>
@@ -4098,7 +3861,7 @@
                       </a:endParaRPr>
                     </a:p>
                   </a:txBody>
-                  <a:tcPr marL="91440" marR="91440" marT="45720" marB="45720">
+                  <a:tcPr>
                     <a:lnL w="12700" cap="flat" cmpd="sng" algn="ctr">
                       <a:solidFill>
                         <a:srgbClr val="1C1C2E"/>
@@ -4145,7 +3908,7 @@
                     <a:bodyPr/>
                     <a:lstStyle/>
                     <a:p>
-                      <a:pPr indent="0" marL="0">
+                      <a:pPr marL="0" indent="0">
                         <a:buNone/>
                       </a:pPr>
                       <a:r>
@@ -4166,7 +3929,7 @@
                       </a:endParaRPr>
                     </a:p>
                   </a:txBody>
-                  <a:tcPr marL="91440" marR="91440" marT="45720" marB="45720">
+                  <a:tcPr>
                     <a:lnL w="12700" cap="flat" cmpd="sng" algn="ctr">
                       <a:solidFill>
                         <a:srgbClr val="1C1C2E"/>
@@ -4213,7 +3976,7 @@
                     <a:bodyPr/>
                     <a:lstStyle/>
                     <a:p>
-                      <a:pPr indent="0" marL="0">
+                      <a:pPr marL="0" indent="0">
                         <a:buNone/>
                       </a:pPr>
                       <a:r>
@@ -4234,7 +3997,7 @@
                       </a:endParaRPr>
                     </a:p>
                   </a:txBody>
-                  <a:tcPr marL="91440" marR="91440" marT="45720" marB="45720">
+                  <a:tcPr>
                     <a:lnL w="12700" cap="flat" cmpd="sng" algn="ctr">
                       <a:solidFill>
                         <a:srgbClr val="1C1C2E"/>
@@ -4276,6 +4039,11 @@
                     </a:solidFill>
                   </a:tcPr>
                 </a:tc>
+                <a:extLst>
+                  <a:ext uri="{0D108BD9-81ED-4DB2-BD59-A6C34878D82A}">
+                    <a16:rowId xmlns:a16="http://schemas.microsoft.com/office/drawing/2014/main" val="10001"/>
+                  </a:ext>
+                </a:extLst>
               </a:tr>
               <a:tr h="502920">
                 <a:tc>
@@ -4283,7 +4051,7 @@
                     <a:bodyPr/>
                     <a:lstStyle/>
                     <a:p>
-                      <a:pPr indent="0" marL="0">
+                      <a:pPr marL="0" indent="0">
                         <a:buNone/>
                       </a:pPr>
                       <a:r>
@@ -4304,7 +4072,7 @@
                       </a:endParaRPr>
                     </a:p>
                   </a:txBody>
-                  <a:tcPr marL="91440" marR="91440" marT="45720" marB="45720">
+                  <a:tcPr>
                     <a:lnL w="12700" cap="flat" cmpd="sng" algn="ctr">
                       <a:solidFill>
                         <a:srgbClr val="1C1C2E"/>
@@ -4351,7 +4119,7 @@
                     <a:bodyPr/>
                     <a:lstStyle/>
                     <a:p>
-                      <a:pPr indent="0" marL="0">
+                      <a:pPr marL="0" indent="0">
                         <a:buNone/>
                       </a:pPr>
                       <a:r>
@@ -4372,7 +4140,7 @@
                       </a:endParaRPr>
                     </a:p>
                   </a:txBody>
-                  <a:tcPr marL="91440" marR="91440" marT="45720" marB="45720">
+                  <a:tcPr>
                     <a:lnL w="12700" cap="flat" cmpd="sng" algn="ctr">
                       <a:solidFill>
                         <a:srgbClr val="1C1C2E"/>
@@ -4419,7 +4187,7 @@
                     <a:bodyPr/>
                     <a:lstStyle/>
                     <a:p>
-                      <a:pPr indent="0" marL="0">
+                      <a:pPr marL="0" indent="0">
                         <a:buNone/>
                       </a:pPr>
                       <a:r>
@@ -4440,7 +4208,7 @@
                       </a:endParaRPr>
                     </a:p>
                   </a:txBody>
-                  <a:tcPr marL="91440" marR="91440" marT="45720" marB="45720">
+                  <a:tcPr>
                     <a:lnL w="12700" cap="flat" cmpd="sng" algn="ctr">
                       <a:solidFill>
                         <a:srgbClr val="1C1C2E"/>
@@ -4487,7 +4255,7 @@
                     <a:bodyPr/>
                     <a:lstStyle/>
                     <a:p>
-                      <a:pPr indent="0" marL="0">
+                      <a:pPr marL="0" indent="0">
                         <a:buNone/>
                       </a:pPr>
                       <a:r>
@@ -4508,7 +4276,7 @@
                       </a:endParaRPr>
                     </a:p>
                   </a:txBody>
-                  <a:tcPr marL="91440" marR="91440" marT="45720" marB="45720">
+                  <a:tcPr>
                     <a:lnL w="12700" cap="flat" cmpd="sng" algn="ctr">
                       <a:solidFill>
                         <a:srgbClr val="1C1C2E"/>
@@ -4550,6 +4318,11 @@
                     </a:solidFill>
                   </a:tcPr>
                 </a:tc>
+                <a:extLst>
+                  <a:ext uri="{0D108BD9-81ED-4DB2-BD59-A6C34878D82A}">
+                    <a16:rowId xmlns:a16="http://schemas.microsoft.com/office/drawing/2014/main" val="10002"/>
+                  </a:ext>
+                </a:extLst>
               </a:tr>
               <a:tr h="502920">
                 <a:tc>
@@ -4557,7 +4330,7 @@
                     <a:bodyPr/>
                     <a:lstStyle/>
                     <a:p>
-                      <a:pPr indent="0" marL="0">
+                      <a:pPr marL="0" indent="0">
                         <a:buNone/>
                       </a:pPr>
                       <a:r>
@@ -4578,7 +4351,7 @@
                       </a:endParaRPr>
                     </a:p>
                   </a:txBody>
-                  <a:tcPr marL="91440" marR="91440" marT="45720" marB="45720">
+                  <a:tcPr>
                     <a:lnL w="12700" cap="flat" cmpd="sng" algn="ctr">
                       <a:solidFill>
                         <a:srgbClr val="1C1C2E"/>
@@ -4625,7 +4398,7 @@
                     <a:bodyPr/>
                     <a:lstStyle/>
                     <a:p>
-                      <a:pPr indent="0" marL="0">
+                      <a:pPr marL="0" indent="0">
                         <a:buNone/>
                       </a:pPr>
                       <a:r>
@@ -4646,7 +4419,7 @@
                       </a:endParaRPr>
                     </a:p>
                   </a:txBody>
-                  <a:tcPr marL="91440" marR="91440" marT="45720" marB="45720">
+                  <a:tcPr>
                     <a:lnL w="12700" cap="flat" cmpd="sng" algn="ctr">
                       <a:solidFill>
                         <a:srgbClr val="1C1C2E"/>
@@ -4693,7 +4466,7 @@
                     <a:bodyPr/>
                     <a:lstStyle/>
                     <a:p>
-                      <a:pPr indent="0" marL="0">
+                      <a:pPr marL="0" indent="0">
                         <a:buNone/>
                       </a:pPr>
                       <a:r>
@@ -4714,7 +4487,7 @@
                       </a:endParaRPr>
                     </a:p>
                   </a:txBody>
-                  <a:tcPr marL="91440" marR="91440" marT="45720" marB="45720">
+                  <a:tcPr>
                     <a:lnL w="12700" cap="flat" cmpd="sng" algn="ctr">
                       <a:solidFill>
                         <a:srgbClr val="1C1C2E"/>
@@ -4761,7 +4534,7 @@
                     <a:bodyPr/>
                     <a:lstStyle/>
                     <a:p>
-                      <a:pPr indent="0" marL="0">
+                      <a:pPr marL="0" indent="0">
                         <a:buNone/>
                       </a:pPr>
                       <a:r>
@@ -4782,7 +4555,7 @@
                       </a:endParaRPr>
                     </a:p>
                   </a:txBody>
-                  <a:tcPr marL="91440" marR="91440" marT="45720" marB="45720">
+                  <a:tcPr>
                     <a:lnL w="12700" cap="flat" cmpd="sng" algn="ctr">
                       <a:solidFill>
                         <a:srgbClr val="1C1C2E"/>
@@ -4824,6 +4597,11 @@
                     </a:solidFill>
                   </a:tcPr>
                 </a:tc>
+                <a:extLst>
+                  <a:ext uri="{0D108BD9-81ED-4DB2-BD59-A6C34878D82A}">
+                    <a16:rowId xmlns:a16="http://schemas.microsoft.com/office/drawing/2014/main" val="10003"/>
+                  </a:ext>
+                </a:extLst>
               </a:tr>
               <a:tr h="502920">
                 <a:tc>
@@ -4831,7 +4609,7 @@
                     <a:bodyPr/>
                     <a:lstStyle/>
                     <a:p>
-                      <a:pPr indent="0" marL="0">
+                      <a:pPr marL="0" indent="0">
                         <a:buNone/>
                       </a:pPr>
                       <a:r>
@@ -4852,7 +4630,7 @@
                       </a:endParaRPr>
                     </a:p>
                   </a:txBody>
-                  <a:tcPr marL="91440" marR="91440" marT="45720" marB="45720">
+                  <a:tcPr>
                     <a:lnL w="12700" cap="flat" cmpd="sng" algn="ctr">
                       <a:solidFill>
                         <a:srgbClr val="1C1C2E"/>
@@ -4899,7 +4677,7 @@
                     <a:bodyPr/>
                     <a:lstStyle/>
                     <a:p>
-                      <a:pPr indent="0" marL="0">
+                      <a:pPr marL="0" indent="0">
                         <a:buNone/>
                       </a:pPr>
                       <a:r>
@@ -4920,7 +4698,7 @@
                       </a:endParaRPr>
                     </a:p>
                   </a:txBody>
-                  <a:tcPr marL="91440" marR="91440" marT="45720" marB="45720">
+                  <a:tcPr>
                     <a:lnL w="12700" cap="flat" cmpd="sng" algn="ctr">
                       <a:solidFill>
                         <a:srgbClr val="1C1C2E"/>
@@ -4967,7 +4745,7 @@
                     <a:bodyPr/>
                     <a:lstStyle/>
                     <a:p>
-                      <a:pPr indent="0" marL="0">
+                      <a:pPr marL="0" indent="0">
                         <a:buNone/>
                       </a:pPr>
                       <a:r>
@@ -4988,7 +4766,7 @@
                       </a:endParaRPr>
                     </a:p>
                   </a:txBody>
-                  <a:tcPr marL="91440" marR="91440" marT="45720" marB="45720">
+                  <a:tcPr>
                     <a:lnL w="12700" cap="flat" cmpd="sng" algn="ctr">
                       <a:solidFill>
                         <a:srgbClr val="1C1C2E"/>
@@ -5035,7 +4813,7 @@
                     <a:bodyPr/>
                     <a:lstStyle/>
                     <a:p>
-                      <a:pPr indent="0" marL="0">
+                      <a:pPr marL="0" indent="0">
                         <a:buNone/>
                       </a:pPr>
                       <a:r>
@@ -5056,7 +4834,7 @@
                       </a:endParaRPr>
                     </a:p>
                   </a:txBody>
-                  <a:tcPr marL="91440" marR="91440" marT="45720" marB="45720">
+                  <a:tcPr>
                     <a:lnL w="12700" cap="flat" cmpd="sng" algn="ctr">
                       <a:solidFill>
                         <a:srgbClr val="1C1C2E"/>
@@ -5098,6 +4876,11 @@
                     </a:solidFill>
                   </a:tcPr>
                 </a:tc>
+                <a:extLst>
+                  <a:ext uri="{0D108BD9-81ED-4DB2-BD59-A6C34878D82A}">
+                    <a16:rowId xmlns:a16="http://schemas.microsoft.com/office/drawing/2014/main" val="10004"/>
+                  </a:ext>
+                </a:extLst>
               </a:tr>
               <a:tr h="548640">
                 <a:tc>
@@ -5105,7 +4888,7 @@
                     <a:bodyPr/>
                     <a:lstStyle/>
                     <a:p>
-                      <a:pPr indent="0" marL="0">
+                      <a:pPr marL="0" indent="0">
                         <a:buNone/>
                       </a:pPr>
                       <a:r>
@@ -5126,7 +4909,7 @@
                       </a:endParaRPr>
                     </a:p>
                   </a:txBody>
-                  <a:tcPr marL="91440" marR="91440" marT="45720" marB="45720">
+                  <a:tcPr>
                     <a:lnL w="12700" cap="flat" cmpd="sng" algn="ctr">
                       <a:solidFill>
                         <a:srgbClr val="1C1C2E"/>
@@ -5173,7 +4956,7 @@
                     <a:bodyPr/>
                     <a:lstStyle/>
                     <a:p>
-                      <a:pPr indent="0" marL="0">
+                      <a:pPr marL="0" indent="0">
                         <a:buNone/>
                       </a:pPr>
                       <a:r>
@@ -5194,7 +4977,7 @@
                       </a:endParaRPr>
                     </a:p>
                   </a:txBody>
-                  <a:tcPr marL="91440" marR="91440" marT="45720" marB="45720">
+                  <a:tcPr>
                     <a:lnL w="12700" cap="flat" cmpd="sng" algn="ctr">
                       <a:solidFill>
                         <a:srgbClr val="1C1C2E"/>
@@ -5241,7 +5024,7 @@
                     <a:bodyPr/>
                     <a:lstStyle/>
                     <a:p>
-                      <a:pPr indent="0" marL="0">
+                      <a:pPr marL="0" indent="0">
                         <a:buNone/>
                       </a:pPr>
                       <a:r>
@@ -5262,7 +5045,7 @@
                       </a:endParaRPr>
                     </a:p>
                   </a:txBody>
-                  <a:tcPr marL="91440" marR="91440" marT="45720" marB="45720">
+                  <a:tcPr>
                     <a:lnL w="12700" cap="flat" cmpd="sng" algn="ctr">
                       <a:solidFill>
                         <a:srgbClr val="1C1C2E"/>
@@ -5309,7 +5092,7 @@
                     <a:bodyPr/>
                     <a:lstStyle/>
                     <a:p>
-                      <a:pPr indent="0" marL="0">
+                      <a:pPr marL="0" indent="0">
                         <a:buNone/>
                       </a:pPr>
                       <a:r>
@@ -5330,7 +5113,7 @@
                       </a:endParaRPr>
                     </a:p>
                   </a:txBody>
-                  <a:tcPr marL="91440" marR="91440" marT="45720" marB="45720">
+                  <a:tcPr>
                     <a:lnL w="12700" cap="flat" cmpd="sng" algn="ctr">
                       <a:solidFill>
                         <a:srgbClr val="1C1C2E"/>
@@ -5372,6 +5155,11 @@
                     </a:solidFill>
                   </a:tcPr>
                 </a:tc>
+                <a:extLst>
+                  <a:ext uri="{0D108BD9-81ED-4DB2-BD59-A6C34878D82A}">
+                    <a16:rowId xmlns:a16="http://schemas.microsoft.com/office/drawing/2014/main" val="10005"/>
+                  </a:ext>
+                </a:extLst>
               </a:tr>
               <a:tr h="502920">
                 <a:tc>
@@ -5379,7 +5167,7 @@
                     <a:bodyPr/>
                     <a:lstStyle/>
                     <a:p>
-                      <a:pPr indent="0" marL="0">
+                      <a:pPr marL="0" indent="0">
                         <a:buNone/>
                       </a:pPr>
                       <a:r>
@@ -5400,7 +5188,7 @@
                       </a:endParaRPr>
                     </a:p>
                   </a:txBody>
-                  <a:tcPr marL="91440" marR="91440" marT="45720" marB="45720">
+                  <a:tcPr>
                     <a:lnL w="12700" cap="flat" cmpd="sng" algn="ctr">
                       <a:solidFill>
                         <a:srgbClr val="1C1C2E"/>
@@ -5447,7 +5235,7 @@
                     <a:bodyPr/>
                     <a:lstStyle/>
                     <a:p>
-                      <a:pPr indent="0" marL="0">
+                      <a:pPr marL="0" indent="0">
                         <a:buNone/>
                       </a:pPr>
                       <a:r>
@@ -5468,7 +5256,7 @@
                       </a:endParaRPr>
                     </a:p>
                   </a:txBody>
-                  <a:tcPr marL="91440" marR="91440" marT="45720" marB="45720">
+                  <a:tcPr>
                     <a:lnL w="12700" cap="flat" cmpd="sng" algn="ctr">
                       <a:solidFill>
                         <a:srgbClr val="1C1C2E"/>
@@ -5515,7 +5303,7 @@
                     <a:bodyPr/>
                     <a:lstStyle/>
                     <a:p>
-                      <a:pPr indent="0" marL="0">
+                      <a:pPr marL="0" indent="0">
                         <a:buNone/>
                       </a:pPr>
                       <a:r>
@@ -5536,7 +5324,7 @@
                       </a:endParaRPr>
                     </a:p>
                   </a:txBody>
-                  <a:tcPr marL="91440" marR="91440" marT="45720" marB="45720">
+                  <a:tcPr>
                     <a:lnL w="12700" cap="flat" cmpd="sng" algn="ctr">
                       <a:solidFill>
                         <a:srgbClr val="1C1C2E"/>
@@ -5583,7 +5371,7 @@
                     <a:bodyPr/>
                     <a:lstStyle/>
                     <a:p>
-                      <a:pPr indent="0" marL="0">
+                      <a:pPr marL="0" indent="0">
                         <a:buNone/>
                       </a:pPr>
                       <a:r>
@@ -5604,7 +5392,7 @@
                       </a:endParaRPr>
                     </a:p>
                   </a:txBody>
-                  <a:tcPr marL="91440" marR="91440" marT="45720" marB="45720">
+                  <a:tcPr>
                     <a:lnL w="12700" cap="flat" cmpd="sng" algn="ctr">
                       <a:solidFill>
                         <a:srgbClr val="1C1C2E"/>
@@ -5646,6 +5434,11 @@
                     </a:solidFill>
                   </a:tcPr>
                 </a:tc>
+                <a:extLst>
+                  <a:ext uri="{0D108BD9-81ED-4DB2-BD59-A6C34878D82A}">
+                    <a16:rowId xmlns:a16="http://schemas.microsoft.com/office/drawing/2014/main" val="10006"/>
+                  </a:ext>
+                </a:extLst>
               </a:tr>
             </a:tbl>
           </a:graphicData>
@@ -5672,7 +5465,7 @@
           <a:bodyPr wrap="square" rtlCol="0" anchor="ctr"/>
           <a:lstStyle/>
           <a:p>
-            <a:pPr indent="0" marL="0">
+            <a:pPr marL="0" indent="0">
               <a:buNone/>
             </a:pPr>
             <a:r>
@@ -5706,6 +5499,7 @@
         <a:solidFill>
           <a:srgbClr val="0D0D14"/>
         </a:solidFill>
+        <a:effectLst/>
       </p:bgPr>
     </p:bg>
     <p:spTree>
@@ -5743,7 +5537,7 @@
           <a:bodyPr wrap="square" rtlCol="0" anchor="ctr"/>
           <a:lstStyle/>
           <a:p>
-            <a:pPr indent="0" marL="0">
+            <a:pPr marL="0" indent="0">
               <a:buNone/>
             </a:pPr>
             <a:r>
@@ -5802,7 +5596,7 @@
           <a:bodyPr wrap="square" rtlCol="0" anchor="ctr"/>
           <a:lstStyle/>
           <a:p>
-            <a:pPr algn="r" indent="0" marL="0">
+            <a:pPr marL="0" indent="0" algn="r">
               <a:buNone/>
             </a:pPr>
             <a:r>
@@ -5841,7 +5635,7 @@
           <a:bodyPr wrap="square" rtlCol="0" anchor="ctr"/>
           <a:lstStyle/>
           <a:p>
-            <a:pPr indent="0" marL="0">
+            <a:pPr marL="0" indent="0">
               <a:buNone/>
             </a:pPr>
             <a:r>
@@ -5902,7 +5696,7 @@
           <a:bodyPr wrap="square" rtlCol="0" anchor="ctr"/>
           <a:lstStyle/>
           <a:p>
-            <a:pPr algn="ctr" indent="0" marL="0">
+            <a:pPr marL="0" indent="0" algn="ctr">
               <a:buNone/>
             </a:pPr>
             <a:r>
@@ -5963,7 +5757,7 @@
           <a:bodyPr wrap="square" rtlCol="0" anchor="ctr"/>
           <a:lstStyle/>
           <a:p>
-            <a:pPr algn="ctr" indent="0" marL="0">
+            <a:pPr marL="0" indent="0" algn="ctr">
               <a:buNone/>
             </a:pPr>
             <a:r>
@@ -6024,7 +5818,7 @@
           <a:bodyPr wrap="square" rtlCol="0" anchor="ctr"/>
           <a:lstStyle/>
           <a:p>
-            <a:pPr algn="ctr" indent="0" marL="0">
+            <a:pPr marL="0" indent="0" algn="ctr">
               <a:buNone/>
             </a:pPr>
             <a:r>
@@ -6085,7 +5879,7 @@
           <a:bodyPr wrap="square" rtlCol="0" anchor="ctr"/>
           <a:lstStyle/>
           <a:p>
-            <a:pPr indent="0" marL="0">
+            <a:pPr marL="0" indent="0">
               <a:buNone/>
             </a:pPr>
             <a:r>
@@ -6124,7 +5918,7 @@
           <a:bodyPr wrap="square" rtlCol="0" anchor="ctr"/>
           <a:lstStyle/>
           <a:p>
-            <a:pPr indent="0" marL="0">
+            <a:pPr marL="0" indent="0">
               <a:buNone/>
             </a:pPr>
             <a:r>
@@ -6163,7 +5957,7 @@
           <a:bodyPr wrap="square" rtlCol="0" anchor="ctr"/>
           <a:lstStyle/>
           <a:p>
-            <a:pPr indent="0" marL="0">
+            <a:pPr marL="0" indent="0">
               <a:lnSpc>
                 <a:spcPct val="120000"/>
               </a:lnSpc>
@@ -6205,7 +5999,7 @@
           <a:bodyPr wrap="square" rtlCol="0" anchor="ctr"/>
           <a:lstStyle/>
           <a:p>
-            <a:pPr indent="0" marL="0">
+            <a:pPr marL="0" indent="0">
               <a:buNone/>
             </a:pPr>
             <a:r>
@@ -6244,7 +6038,7 @@
           <a:bodyPr wrap="square" rtlCol="0" anchor="ctr"/>
           <a:lstStyle/>
           <a:p>
-            <a:pPr indent="0" marL="0">
+            <a:pPr marL="0" indent="0">
               <a:buNone/>
             </a:pPr>
             <a:r>
@@ -6283,7 +6077,7 @@
           <a:bodyPr wrap="square" rtlCol="0" anchor="ctr"/>
           <a:lstStyle/>
           <a:p>
-            <a:pPr indent="0" marL="0">
+            <a:pPr marL="0" indent="0">
               <a:lnSpc>
                 <a:spcPct val="120000"/>
               </a:lnSpc>
@@ -6325,7 +6119,7 @@
           <a:bodyPr wrap="square" rtlCol="0" anchor="ctr"/>
           <a:lstStyle/>
           <a:p>
-            <a:pPr indent="0" marL="0">
+            <a:pPr marL="0" indent="0">
               <a:buNone/>
             </a:pPr>
             <a:r>
@@ -6364,7 +6158,7 @@
           <a:bodyPr wrap="square" rtlCol="0" anchor="ctr"/>
           <a:lstStyle/>
           <a:p>
-            <a:pPr indent="0" marL="0">
+            <a:pPr marL="0" indent="0">
               <a:buNone/>
             </a:pPr>
             <a:r>
@@ -6403,7 +6197,7 @@
           <a:bodyPr wrap="square" rtlCol="0" anchor="ctr"/>
           <a:lstStyle/>
           <a:p>
-            <a:pPr indent="0" marL="0">
+            <a:pPr marL="0" indent="0">
               <a:lnSpc>
                 <a:spcPct val="120000"/>
               </a:lnSpc>
@@ -6445,7 +6239,7 @@
           <a:bodyPr wrap="square" rtlCol="0" anchor="ctr"/>
           <a:lstStyle/>
           <a:p>
-            <a:pPr indent="0" marL="0">
+            <a:pPr marL="0" indent="0">
               <a:buNone/>
             </a:pPr>
             <a:r>
@@ -6484,7 +6278,7 @@
           <a:bodyPr wrap="square" rtlCol="0" anchor="ctr"/>
           <a:lstStyle/>
           <a:p>
-            <a:pPr indent="0" marL="0">
+            <a:pPr marL="0" indent="0">
               <a:buNone/>
             </a:pPr>
             <a:r>
@@ -6523,7 +6317,7 @@
           <a:bodyPr wrap="square" rtlCol="0" anchor="ctr"/>
           <a:lstStyle/>
           <a:p>
-            <a:pPr indent="0" marL="0">
+            <a:pPr marL="0" indent="0">
               <a:lnSpc>
                 <a:spcPct val="120000"/>
               </a:lnSpc>
@@ -6565,7 +6359,7 @@
           <a:bodyPr wrap="square" rtlCol="0" anchor="ctr"/>
           <a:lstStyle/>
           <a:p>
-            <a:pPr indent="0" marL="0">
+            <a:pPr marL="0" indent="0">
               <a:buNone/>
             </a:pPr>
             <a:r>
@@ -6709,6 +6503,7 @@
         <a:solidFill>
           <a:srgbClr val="0D0D14"/>
         </a:solidFill>
+        <a:effectLst/>
       </p:bgPr>
     </p:bg>
     <p:spTree>
@@ -6746,7 +6541,7 @@
           <a:bodyPr wrap="square" rtlCol="0" anchor="ctr"/>
           <a:lstStyle/>
           <a:p>
-            <a:pPr indent="0" marL="0">
+            <a:pPr marL="0" indent="0">
               <a:buNone/>
             </a:pPr>
             <a:r>
@@ -6805,7 +6600,7 @@
           <a:bodyPr wrap="square" rtlCol="0" anchor="ctr"/>
           <a:lstStyle/>
           <a:p>
-            <a:pPr algn="r" indent="0" marL="0">
+            <a:pPr marL="0" indent="0" algn="r">
               <a:buNone/>
             </a:pPr>
             <a:r>
@@ -6844,7 +6639,7 @@
           <a:bodyPr wrap="square" rtlCol="0" anchor="ctr"/>
           <a:lstStyle/>
           <a:p>
-            <a:pPr indent="0" marL="0">
+            <a:pPr marL="0" indent="0">
               <a:buNone/>
             </a:pPr>
             <a:r>
@@ -6883,7 +6678,7 @@
           <a:bodyPr wrap="square" rtlCol="0" anchor="ctr"/>
           <a:lstStyle/>
           <a:p>
-            <a:pPr indent="0" marL="0">
+            <a:pPr marL="0" indent="0">
               <a:buNone/>
             </a:pPr>
             <a:r>
@@ -6942,7 +6737,7 @@
           <a:bodyPr wrap="square" rtlCol="0" anchor="ctr"/>
           <a:lstStyle/>
           <a:p>
-            <a:pPr indent="0" marL="0">
+            <a:pPr marL="0" indent="0">
               <a:buNone/>
             </a:pPr>
             <a:r>
@@ -6981,7 +6776,7 @@
           <a:bodyPr wrap="square" rtlCol="0" anchor="ctr"/>
           <a:lstStyle/>
           <a:p>
-            <a:pPr indent="0" marL="0">
+            <a:pPr marL="0" indent="0">
               <a:buNone/>
             </a:pPr>
             <a:r>
@@ -7040,7 +6835,7 @@
           <a:bodyPr wrap="square" rtlCol="0" anchor="ctr"/>
           <a:lstStyle/>
           <a:p>
-            <a:pPr indent="0" marL="0">
+            <a:pPr marL="0" indent="0">
               <a:buNone/>
             </a:pPr>
             <a:r>
@@ -7079,7 +6874,7 @@
           <a:bodyPr wrap="square" rtlCol="0" anchor="ctr"/>
           <a:lstStyle/>
           <a:p>
-            <a:pPr indent="0" marL="0">
+            <a:pPr marL="0" indent="0">
               <a:buNone/>
             </a:pPr>
             <a:r>
@@ -7138,7 +6933,7 @@
           <a:bodyPr wrap="square" rtlCol="0" anchor="ctr"/>
           <a:lstStyle/>
           <a:p>
-            <a:pPr indent="0" marL="0">
+            <a:pPr marL="0" indent="0">
               <a:buNone/>
             </a:pPr>
             <a:r>
@@ -7177,7 +6972,7 @@
           <a:bodyPr wrap="square" rtlCol="0" anchor="ctr"/>
           <a:lstStyle/>
           <a:p>
-            <a:pPr indent="0" marL="0">
+            <a:pPr marL="0" indent="0">
               <a:buNone/>
             </a:pPr>
             <a:r>
@@ -7236,7 +7031,7 @@
           <a:bodyPr wrap="square" rtlCol="0" anchor="ctr"/>
           <a:lstStyle/>
           <a:p>
-            <a:pPr indent="0" marL="0">
+            <a:pPr marL="0" indent="0">
               <a:buNone/>
             </a:pPr>
             <a:r>
@@ -7275,7 +7070,7 @@
           <a:bodyPr wrap="square" rtlCol="0" anchor="ctr"/>
           <a:lstStyle/>
           <a:p>
-            <a:pPr indent="0" marL="0">
+            <a:pPr marL="0" indent="0">
               <a:buNone/>
             </a:pPr>
             <a:r>
@@ -7301,7 +7096,7 @@
         </p:nvSpPr>
         <p:spPr>
           <a:xfrm>
-            <a:off x="914400" y="5669280"/>
+            <a:off x="944880" y="6126480"/>
             <a:ext cx="10058400" cy="548640"/>
           </a:xfrm>
           <a:prstGeom prst="rect">
@@ -7314,7 +7109,7 @@
           <a:bodyPr wrap="square" rtlCol="0" anchor="ctr"/>
           <a:lstStyle/>
           <a:p>
-            <a:pPr algn="ctr" indent="0" marL="0">
+            <a:pPr marL="0" indent="0" algn="ctr">
               <a:lnSpc>
                 <a:spcPct val="140000"/>
               </a:lnSpc>
@@ -7334,7 +7129,7 @@
             <a:endParaRPr lang="en-US" sz="1400" dirty="0"/>
           </a:p>
           <a:p>
-            <a:pPr algn="ctr" indent="0" marL="0">
+            <a:pPr marL="0" indent="0" algn="ctr">
               <a:lnSpc>
                 <a:spcPct val="140000"/>
               </a:lnSpc>
@@ -7371,6 +7166,7 @@
         <a:solidFill>
           <a:srgbClr val="0D0D14"/>
         </a:solidFill>
+        <a:effectLst/>
       </p:bgPr>
     </p:bg>
     <p:spTree>
@@ -7408,7 +7204,7 @@
           <a:bodyPr wrap="square" rtlCol="0" anchor="ctr"/>
           <a:lstStyle/>
           <a:p>
-            <a:pPr indent="0" marL="0">
+            <a:pPr marL="0" indent="0">
               <a:buNone/>
             </a:pPr>
             <a:r>
@@ -7467,7 +7263,7 @@
           <a:bodyPr wrap="square" rtlCol="0" anchor="ctr"/>
           <a:lstStyle/>
           <a:p>
-            <a:pPr algn="r" indent="0" marL="0">
+            <a:pPr marL="0" indent="0" algn="r">
               <a:buNone/>
             </a:pPr>
             <a:r>
@@ -7506,7 +7302,7 @@
           <a:bodyPr wrap="square" rtlCol="0" anchor="ctr"/>
           <a:lstStyle/>
           <a:p>
-            <a:pPr indent="0" marL="0">
+            <a:pPr marL="0" indent="0">
               <a:lnSpc>
                 <a:spcPct val="140000"/>
               </a:lnSpc>
@@ -7526,7 +7322,7 @@
             <a:endParaRPr lang="en-US" sz="2400" dirty="0"/>
           </a:p>
           <a:p>
-            <a:pPr indent="0" marL="0">
+            <a:pPr marL="0" indent="0">
               <a:lnSpc>
                 <a:spcPct val="140000"/>
               </a:lnSpc>
@@ -7700,7 +7496,7 @@
           <a:bodyPr wrap="square" rtlCol="0" anchor="ctr"/>
           <a:lstStyle/>
           <a:p>
-            <a:pPr indent="0" marL="0">
+            <a:pPr marL="0" indent="0">
               <a:buNone/>
             </a:pPr>
             <a:r>
@@ -7717,7 +7513,7 @@
             <a:endParaRPr lang="en-US" sz="1400" dirty="0"/>
           </a:p>
           <a:p>
-            <a:pPr indent="0" marL="0">
+            <a:pPr marL="0" indent="0">
               <a:buNone/>
             </a:pPr>
             <a:r>
@@ -7751,6 +7547,7 @@
         <a:solidFill>
           <a:srgbClr val="0D0D14"/>
         </a:solidFill>
+        <a:effectLst/>
       </p:bgPr>
     </p:bg>
     <p:spTree>
@@ -7788,7 +7585,7 @@
           <a:bodyPr wrap="square" rtlCol="0" anchor="ctr"/>
           <a:lstStyle/>
           <a:p>
-            <a:pPr indent="0" marL="0">
+            <a:pPr marL="0" indent="0">
               <a:buNone/>
             </a:pPr>
             <a:r>
@@ -7847,7 +7644,7 @@
           <a:bodyPr wrap="square" rtlCol="0" anchor="ctr"/>
           <a:lstStyle/>
           <a:p>
-            <a:pPr algn="r" indent="0" marL="0">
+            <a:pPr marL="0" indent="0" algn="r">
               <a:buNone/>
             </a:pPr>
             <a:r>
@@ -7886,7 +7683,7 @@
           <a:bodyPr wrap="square" rtlCol="0" anchor="ctr"/>
           <a:lstStyle/>
           <a:p>
-            <a:pPr indent="0" marL="0">
+            <a:pPr marL="0" indent="0">
               <a:lnSpc>
                 <a:spcPct val="140000"/>
               </a:lnSpc>
@@ -7906,7 +7703,7 @@
             <a:endParaRPr lang="en-US" sz="2000" dirty="0"/>
           </a:p>
           <a:p>
-            <a:pPr indent="0" marL="0">
+            <a:pPr marL="0" indent="0">
               <a:lnSpc>
                 <a:spcPct val="140000"/>
               </a:lnSpc>
@@ -7975,7 +7772,7 @@
           <a:bodyPr wrap="square" rtlCol="0" anchor="ctr"/>
           <a:lstStyle/>
           <a:p>
-            <a:pPr algn="ctr" indent="0" marL="0">
+            <a:pPr marL="0" indent="0" algn="ctr">
               <a:buNone/>
             </a:pPr>
             <a:r>
@@ -8014,7 +7811,7 @@
           <a:bodyPr wrap="square" rtlCol="0" anchor="ctr"/>
           <a:lstStyle/>
           <a:p>
-            <a:pPr algn="ctr" indent="0" marL="0">
+            <a:pPr marL="0" indent="0" algn="ctr">
               <a:lnSpc>
                 <a:spcPct val="130000"/>
               </a:lnSpc>
@@ -8056,7 +7853,7 @@
           <a:bodyPr wrap="square" rtlCol="0" anchor="ctr"/>
           <a:lstStyle/>
           <a:p>
-            <a:pPr algn="ctr" indent="0" marL="0">
+            <a:pPr marL="0" indent="0" algn="ctr">
               <a:buNone/>
             </a:pPr>
             <a:r>
@@ -8122,7 +7919,7 @@
           <a:bodyPr wrap="square" rtlCol="0" anchor="ctr"/>
           <a:lstStyle/>
           <a:p>
-            <a:pPr algn="ctr" indent="0" marL="0">
+            <a:pPr marL="0" indent="0" algn="ctr">
               <a:buNone/>
             </a:pPr>
             <a:r>
@@ -8161,7 +7958,7 @@
           <a:bodyPr wrap="square" rtlCol="0" anchor="ctr"/>
           <a:lstStyle/>
           <a:p>
-            <a:pPr algn="ctr" indent="0" marL="0">
+            <a:pPr marL="0" indent="0" algn="ctr">
               <a:lnSpc>
                 <a:spcPct val="130000"/>
               </a:lnSpc>
@@ -8203,7 +8000,7 @@
           <a:bodyPr wrap="square" rtlCol="0" anchor="ctr"/>
           <a:lstStyle/>
           <a:p>
-            <a:pPr algn="ctr" indent="0" marL="0">
+            <a:pPr marL="0" indent="0" algn="ctr">
               <a:buNone/>
             </a:pPr>
             <a:r>
@@ -8269,7 +8066,7 @@
           <a:bodyPr wrap="square" rtlCol="0" anchor="ctr"/>
           <a:lstStyle/>
           <a:p>
-            <a:pPr algn="ctr" indent="0" marL="0">
+            <a:pPr marL="0" indent="0" algn="ctr">
               <a:buNone/>
             </a:pPr>
             <a:r>
@@ -8308,7 +8105,7 @@
           <a:bodyPr wrap="square" rtlCol="0" anchor="ctr"/>
           <a:lstStyle/>
           <a:p>
-            <a:pPr algn="ctr" indent="0" marL="0">
+            <a:pPr marL="0" indent="0" algn="ctr">
               <a:lnSpc>
                 <a:spcPct val="130000"/>
               </a:lnSpc>
@@ -8350,7 +8147,7 @@
           <a:bodyPr wrap="square" rtlCol="0" anchor="ctr"/>
           <a:lstStyle/>
           <a:p>
-            <a:pPr algn="ctr" indent="0" marL="0">
+            <a:pPr marL="0" indent="0" algn="ctr">
               <a:buNone/>
             </a:pPr>
             <a:r>
@@ -8416,7 +8213,7 @@
           <a:bodyPr wrap="square" rtlCol="0" anchor="ctr"/>
           <a:lstStyle/>
           <a:p>
-            <a:pPr algn="ctr" indent="0" marL="0">
+            <a:pPr marL="0" indent="0" algn="ctr">
               <a:buNone/>
             </a:pPr>
             <a:r>
@@ -8455,7 +8252,7 @@
           <a:bodyPr wrap="square" rtlCol="0" anchor="ctr"/>
           <a:lstStyle/>
           <a:p>
-            <a:pPr algn="ctr" indent="0" marL="0">
+            <a:pPr marL="0" indent="0" algn="ctr">
               <a:lnSpc>
                 <a:spcPct val="130000"/>
               </a:lnSpc>
@@ -8497,7 +8294,7 @@
           <a:bodyPr wrap="square" rtlCol="0" anchor="ctr"/>
           <a:lstStyle/>
           <a:p>
-            <a:pPr algn="ctr" indent="0" marL="0">
+            <a:pPr marL="0" indent="0" algn="ctr">
               <a:buNone/>
             </a:pPr>
             <a:r>
@@ -8531,6 +8328,7 @@
         <a:solidFill>
           <a:srgbClr val="0D0D14"/>
         </a:solidFill>
+        <a:effectLst/>
       </p:bgPr>
     </p:bg>
     <p:spTree>
@@ -8568,7 +8366,7 @@
           <a:bodyPr wrap="square" rtlCol="0" anchor="ctr"/>
           <a:lstStyle/>
           <a:p>
-            <a:pPr indent="0" marL="0">
+            <a:pPr marL="0" indent="0">
               <a:buNone/>
             </a:pPr>
             <a:r>
@@ -8627,7 +8425,7 @@
           <a:bodyPr wrap="square" rtlCol="0" anchor="ctr"/>
           <a:lstStyle/>
           <a:p>
-            <a:pPr algn="r" indent="0" marL="0">
+            <a:pPr marL="0" indent="0" algn="r">
               <a:buNone/>
             </a:pPr>
             <a:r>
@@ -8666,7 +8464,7 @@
           <a:bodyPr wrap="square" rtlCol="0" anchor="ctr"/>
           <a:lstStyle/>
           <a:p>
-            <a:pPr indent="0" marL="0">
+            <a:pPr marL="0" indent="0">
               <a:buNone/>
             </a:pPr>
             <a:r>
@@ -8732,7 +8530,7 @@
           <a:bodyPr wrap="square" rtlCol="0" anchor="ctr"/>
           <a:lstStyle/>
           <a:p>
-            <a:pPr indent="0" marL="0">
+            <a:pPr marL="0" indent="0">
               <a:buNone/>
             </a:pPr>
             <a:r>
@@ -8771,7 +8569,7 @@
           <a:bodyPr wrap="square" rtlCol="0" anchor="ctr"/>
           <a:lstStyle/>
           <a:p>
-            <a:pPr indent="0" marL="0">
+            <a:pPr marL="0" indent="0">
               <a:lnSpc>
                 <a:spcPct val="120000"/>
               </a:lnSpc>
@@ -8840,7 +8638,7 @@
           <a:bodyPr wrap="square" rtlCol="0" anchor="ctr"/>
           <a:lstStyle/>
           <a:p>
-            <a:pPr indent="0" marL="0">
+            <a:pPr marL="0" indent="0">
               <a:buNone/>
             </a:pPr>
             <a:r>
@@ -8879,7 +8677,7 @@
           <a:bodyPr wrap="square" rtlCol="0" anchor="ctr"/>
           <a:lstStyle/>
           <a:p>
-            <a:pPr indent="0" marL="0">
+            <a:pPr marL="0" indent="0">
               <a:lnSpc>
                 <a:spcPct val="120000"/>
               </a:lnSpc>
@@ -8948,7 +8746,7 @@
           <a:bodyPr wrap="square" rtlCol="0" anchor="ctr"/>
           <a:lstStyle/>
           <a:p>
-            <a:pPr indent="0" marL="0">
+            <a:pPr marL="0" indent="0">
               <a:buNone/>
             </a:pPr>
             <a:r>
@@ -8987,7 +8785,7 @@
           <a:bodyPr wrap="square" rtlCol="0" anchor="ctr"/>
           <a:lstStyle/>
           <a:p>
-            <a:pPr indent="0" marL="0">
+            <a:pPr marL="0" indent="0">
               <a:lnSpc>
                 <a:spcPct val="120000"/>
               </a:lnSpc>
@@ -9056,7 +8854,7 @@
           <a:bodyPr wrap="square" rtlCol="0" anchor="ctr"/>
           <a:lstStyle/>
           <a:p>
-            <a:pPr indent="0" marL="0">
+            <a:pPr marL="0" indent="0">
               <a:buNone/>
             </a:pPr>
             <a:r>
@@ -9095,7 +8893,7 @@
           <a:bodyPr wrap="square" rtlCol="0" anchor="ctr"/>
           <a:lstStyle/>
           <a:p>
-            <a:pPr indent="0" marL="0">
+            <a:pPr marL="0" indent="0">
               <a:lnSpc>
                 <a:spcPct val="120000"/>
               </a:lnSpc>
@@ -9164,7 +8962,7 @@
           <a:bodyPr wrap="square" rtlCol="0" anchor="ctr"/>
           <a:lstStyle/>
           <a:p>
-            <a:pPr indent="0" marL="0">
+            <a:pPr marL="0" indent="0">
               <a:buNone/>
             </a:pPr>
             <a:r>
@@ -9203,7 +9001,7 @@
           <a:bodyPr wrap="square" rtlCol="0" anchor="ctr"/>
           <a:lstStyle/>
           <a:p>
-            <a:pPr indent="0" marL="0">
+            <a:pPr marL="0" indent="0">
               <a:lnSpc>
                 <a:spcPct val="120000"/>
               </a:lnSpc>
@@ -9272,7 +9070,7 @@
           <a:bodyPr wrap="square" rtlCol="0" anchor="ctr"/>
           <a:lstStyle/>
           <a:p>
-            <a:pPr indent="0" marL="0">
+            <a:pPr marL="0" indent="0">
               <a:buNone/>
             </a:pPr>
             <a:r>
@@ -9311,7 +9109,7 @@
           <a:bodyPr wrap="square" rtlCol="0" anchor="ctr"/>
           <a:lstStyle/>
           <a:p>
-            <a:pPr indent="0" marL="0">
+            <a:pPr marL="0" indent="0">
               <a:lnSpc>
                 <a:spcPct val="120000"/>
               </a:lnSpc>
@@ -9348,6 +9146,7 @@
         <a:solidFill>
           <a:srgbClr val="0D0D14"/>
         </a:solidFill>
+        <a:effectLst/>
       </p:bgPr>
     </p:bg>
     <p:spTree>
@@ -9385,7 +9184,7 @@
           <a:bodyPr wrap="square" rtlCol="0" anchor="ctr"/>
           <a:lstStyle/>
           <a:p>
-            <a:pPr indent="0" marL="0">
+            <a:pPr marL="0" indent="0">
               <a:buNone/>
             </a:pPr>
             <a:r>
@@ -9444,7 +9243,7 @@
           <a:bodyPr wrap="square" rtlCol="0" anchor="ctr"/>
           <a:lstStyle/>
           <a:p>
-            <a:pPr algn="r" indent="0" marL="0">
+            <a:pPr marL="0" indent="0" algn="r">
               <a:buNone/>
             </a:pPr>
             <a:r>
@@ -9483,7 +9282,7 @@
           <a:bodyPr wrap="square" rtlCol="0" anchor="ctr"/>
           <a:lstStyle/>
           <a:p>
-            <a:pPr indent="0" marL="0">
+            <a:pPr marL="0" indent="0">
               <a:buNone/>
             </a:pPr>
             <a:r>
@@ -9547,7 +9346,7 @@
           <a:bodyPr wrap="square" rtlCol="0" anchor="ctr"/>
           <a:lstStyle/>
           <a:p>
-            <a:pPr algn="ctr" indent="0" marL="0">
+            <a:pPr marL="0" indent="0" algn="ctr">
               <a:buNone/>
             </a:pPr>
             <a:r>
@@ -9586,7 +9385,7 @@
           <a:bodyPr wrap="square" rtlCol="0" anchor="ctr"/>
           <a:lstStyle/>
           <a:p>
-            <a:pPr algn="ctr" indent="0" marL="0">
+            <a:pPr marL="0" indent="0" algn="ctr">
               <a:buNone/>
             </a:pPr>
             <a:r>
@@ -9625,7 +9424,7 @@
           <a:bodyPr wrap="square" rtlCol="0" anchor="ctr"/>
           <a:lstStyle/>
           <a:p>
-            <a:pPr algn="ctr" indent="0" marL="0">
+            <a:pPr marL="0" indent="0" algn="ctr">
               <a:lnSpc>
                 <a:spcPct val="120000"/>
               </a:lnSpc>
@@ -9645,7 +9444,7 @@
             <a:endParaRPr lang="en-US" sz="1000" dirty="0"/>
           </a:p>
           <a:p>
-            <a:pPr algn="ctr" indent="0" marL="0">
+            <a:pPr marL="0" indent="0" algn="ctr">
               <a:lnSpc>
                 <a:spcPct val="120000"/>
               </a:lnSpc>
@@ -9712,7 +9511,7 @@
           <a:bodyPr wrap="square" rtlCol="0" anchor="ctr"/>
           <a:lstStyle/>
           <a:p>
-            <a:pPr algn="ctr" indent="0" marL="0">
+            <a:pPr marL="0" indent="0" algn="ctr">
               <a:buNone/>
             </a:pPr>
             <a:r>
@@ -9751,7 +9550,7 @@
           <a:bodyPr wrap="square" rtlCol="0" anchor="ctr"/>
           <a:lstStyle/>
           <a:p>
-            <a:pPr algn="ctr" indent="0" marL="0">
+            <a:pPr marL="0" indent="0" algn="ctr">
               <a:buNone/>
             </a:pPr>
             <a:r>
@@ -9790,7 +9589,7 @@
           <a:bodyPr wrap="square" rtlCol="0" anchor="ctr"/>
           <a:lstStyle/>
           <a:p>
-            <a:pPr algn="ctr" indent="0" marL="0">
+            <a:pPr marL="0" indent="0" algn="ctr">
               <a:lnSpc>
                 <a:spcPct val="120000"/>
               </a:lnSpc>
@@ -9810,7 +9609,7 @@
             <a:endParaRPr lang="en-US" sz="1000" dirty="0"/>
           </a:p>
           <a:p>
-            <a:pPr algn="ctr" indent="0" marL="0">
+            <a:pPr marL="0" indent="0" algn="ctr">
               <a:lnSpc>
                 <a:spcPct val="120000"/>
               </a:lnSpc>
@@ -9877,7 +9676,7 @@
           <a:bodyPr wrap="square" rtlCol="0" anchor="ctr"/>
           <a:lstStyle/>
           <a:p>
-            <a:pPr algn="ctr" indent="0" marL="0">
+            <a:pPr marL="0" indent="0" algn="ctr">
               <a:buNone/>
             </a:pPr>
             <a:r>
@@ -9916,7 +9715,7 @@
           <a:bodyPr wrap="square" rtlCol="0" anchor="ctr"/>
           <a:lstStyle/>
           <a:p>
-            <a:pPr algn="ctr" indent="0" marL="0">
+            <a:pPr marL="0" indent="0" algn="ctr">
               <a:buNone/>
             </a:pPr>
             <a:r>
@@ -9955,7 +9754,7 @@
           <a:bodyPr wrap="square" rtlCol="0" anchor="ctr"/>
           <a:lstStyle/>
           <a:p>
-            <a:pPr algn="ctr" indent="0" marL="0">
+            <a:pPr marL="0" indent="0" algn="ctr">
               <a:lnSpc>
                 <a:spcPct val="120000"/>
               </a:lnSpc>
@@ -9975,7 +9774,7 @@
             <a:endParaRPr lang="en-US" sz="1000" dirty="0"/>
           </a:p>
           <a:p>
-            <a:pPr algn="ctr" indent="0" marL="0">
+            <a:pPr marL="0" indent="0" algn="ctr">
               <a:lnSpc>
                 <a:spcPct val="120000"/>
               </a:lnSpc>
@@ -10017,7 +9816,7 @@
           <a:bodyPr wrap="square" rtlCol="0" anchor="ctr"/>
           <a:lstStyle/>
           <a:p>
-            <a:pPr indent="0" marL="0">
+            <a:pPr marL="0" indent="0">
               <a:buNone/>
             </a:pPr>
             <a:r>
@@ -10051,6 +9850,7 @@
         <a:solidFill>
           <a:srgbClr val="0D0D14"/>
         </a:solidFill>
+        <a:effectLst/>
       </p:bgPr>
     </p:bg>
     <p:spTree>
@@ -10088,7 +9888,7 @@
           <a:bodyPr wrap="square" rtlCol="0" anchor="ctr"/>
           <a:lstStyle/>
           <a:p>
-            <a:pPr indent="0" marL="0">
+            <a:pPr marL="0" indent="0">
               <a:buNone/>
             </a:pPr>
             <a:r>
@@ -10147,7 +9947,7 @@
           <a:bodyPr wrap="square" rtlCol="0" anchor="ctr"/>
           <a:lstStyle/>
           <a:p>
-            <a:pPr algn="r" indent="0" marL="0">
+            <a:pPr marL="0" indent="0" algn="r">
               <a:buNone/>
             </a:pPr>
             <a:r>
@@ -10186,7 +9986,7 @@
           <a:bodyPr wrap="square" rtlCol="0" anchor="ctr"/>
           <a:lstStyle/>
           <a:p>
-            <a:pPr indent="0" marL="0">
+            <a:pPr marL="0" indent="0">
               <a:buNone/>
             </a:pPr>
             <a:r>
@@ -10220,17 +10020,41 @@
         </p:nvGraphicFramePr>
         <p:xfrm>
           <a:off x="457200" y="2011680"/>
-          <a:ext cx="10972800" cy="3200400"/>
+          <a:ext cx="10972800" cy="2651760"/>
         </p:xfrm>
         <a:graphic>
           <a:graphicData uri="http://schemas.openxmlformats.org/drawingml/2006/table">
             <a:tbl>
               <a:tblPr/>
               <a:tblGrid>
-                <a:gridCol w="1828800"/>
-                <a:gridCol w="1645920"/>
-                <a:gridCol w="4572000"/>
-                <a:gridCol w="2926080"/>
+                <a:gridCol w="1828800">
+                  <a:extLst>
+                    <a:ext uri="{9D8B030D-6E8A-4147-A177-3AD203B41FA5}">
+                      <a16:colId xmlns:a16="http://schemas.microsoft.com/office/drawing/2014/main" val="20000"/>
+                    </a:ext>
+                  </a:extLst>
+                </a:gridCol>
+                <a:gridCol w="1645920">
+                  <a:extLst>
+                    <a:ext uri="{9D8B030D-6E8A-4147-A177-3AD203B41FA5}">
+                      <a16:colId xmlns:a16="http://schemas.microsoft.com/office/drawing/2014/main" val="20001"/>
+                    </a:ext>
+                  </a:extLst>
+                </a:gridCol>
+                <a:gridCol w="4572000">
+                  <a:extLst>
+                    <a:ext uri="{9D8B030D-6E8A-4147-A177-3AD203B41FA5}">
+                      <a16:colId xmlns:a16="http://schemas.microsoft.com/office/drawing/2014/main" val="20002"/>
+                    </a:ext>
+                  </a:extLst>
+                </a:gridCol>
+                <a:gridCol w="2926080">
+                  <a:extLst>
+                    <a:ext uri="{9D8B030D-6E8A-4147-A177-3AD203B41FA5}">
+                      <a16:colId xmlns:a16="http://schemas.microsoft.com/office/drawing/2014/main" val="20003"/>
+                    </a:ext>
+                  </a:extLst>
+                </a:gridCol>
               </a:tblGrid>
               <a:tr h="457200">
                 <a:tc>
@@ -10238,7 +10062,7 @@
                     <a:bodyPr/>
                     <a:lstStyle/>
                     <a:p>
-                      <a:pPr indent="0" marL="0">
+                      <a:pPr marL="0" indent="0">
                         <a:buNone/>
                       </a:pPr>
                       <a:r>
@@ -10259,7 +10083,7 @@
                       </a:endParaRPr>
                     </a:p>
                   </a:txBody>
-                  <a:tcPr marL="91440" marR="91440" marT="45720" marB="45720">
+                  <a:tcPr>
                     <a:lnL w="12700" cap="flat" cmpd="sng" algn="ctr">
                       <a:solidFill>
                         <a:srgbClr val="1C1C2E"/>
@@ -10306,7 +10130,7 @@
                     <a:bodyPr/>
                     <a:lstStyle/>
                     <a:p>
-                      <a:pPr indent="0" marL="0">
+                      <a:pPr marL="0" indent="0">
                         <a:buNone/>
                       </a:pPr>
                       <a:r>
@@ -10327,7 +10151,7 @@
                       </a:endParaRPr>
                     </a:p>
                   </a:txBody>
-                  <a:tcPr marL="91440" marR="91440" marT="45720" marB="45720">
+                  <a:tcPr>
                     <a:lnL w="12700" cap="flat" cmpd="sng" algn="ctr">
                       <a:solidFill>
                         <a:srgbClr val="1C1C2E"/>
@@ -10374,7 +10198,7 @@
                     <a:bodyPr/>
                     <a:lstStyle/>
                     <a:p>
-                      <a:pPr indent="0" marL="0">
+                      <a:pPr marL="0" indent="0">
                         <a:buNone/>
                       </a:pPr>
                       <a:r>
@@ -10395,7 +10219,7 @@
                       </a:endParaRPr>
                     </a:p>
                   </a:txBody>
-                  <a:tcPr marL="91440" marR="91440" marT="45720" marB="45720">
+                  <a:tcPr>
                     <a:lnL w="12700" cap="flat" cmpd="sng" algn="ctr">
                       <a:solidFill>
                         <a:srgbClr val="1C1C2E"/>
@@ -10442,7 +10266,7 @@
                     <a:bodyPr/>
                     <a:lstStyle/>
                     <a:p>
-                      <a:pPr indent="0" marL="0">
+                      <a:pPr marL="0" indent="0">
                         <a:buNone/>
                       </a:pPr>
                       <a:r>
@@ -10463,7 +10287,7 @@
                       </a:endParaRPr>
                     </a:p>
                   </a:txBody>
-                  <a:tcPr marL="91440" marR="91440" marT="45720" marB="45720">
+                  <a:tcPr>
                     <a:lnL w="12700" cap="flat" cmpd="sng" algn="ctr">
                       <a:solidFill>
                         <a:srgbClr val="1C1C2E"/>
@@ -10505,6 +10329,11 @@
                     </a:solidFill>
                   </a:tcPr>
                 </a:tc>
+                <a:extLst>
+                  <a:ext uri="{0D108BD9-81ED-4DB2-BD59-A6C34878D82A}">
+                    <a16:rowId xmlns:a16="http://schemas.microsoft.com/office/drawing/2014/main" val="10000"/>
+                  </a:ext>
+                </a:extLst>
               </a:tr>
               <a:tr h="548640">
                 <a:tc>
@@ -10512,7 +10341,7 @@
                     <a:bodyPr/>
                     <a:lstStyle/>
                     <a:p>
-                      <a:pPr indent="0" marL="0">
+                      <a:pPr marL="0" indent="0">
                         <a:buNone/>
                       </a:pPr>
                       <a:r>
@@ -10533,7 +10362,7 @@
                       </a:endParaRPr>
                     </a:p>
                   </a:txBody>
-                  <a:tcPr marL="91440" marR="91440" marT="45720" marB="45720">
+                  <a:tcPr>
                     <a:lnL w="12700" cap="flat" cmpd="sng" algn="ctr">
                       <a:solidFill>
                         <a:srgbClr val="1C1C2E"/>
@@ -10580,7 +10409,7 @@
                     <a:bodyPr/>
                     <a:lstStyle/>
                     <a:p>
-                      <a:pPr indent="0" marL="0">
+                      <a:pPr marL="0" indent="0">
                         <a:buNone/>
                       </a:pPr>
                       <a:r>
@@ -10601,7 +10430,7 @@
                       </a:endParaRPr>
                     </a:p>
                   </a:txBody>
-                  <a:tcPr marL="91440" marR="91440" marT="45720" marB="45720">
+                  <a:tcPr>
                     <a:lnL w="12700" cap="flat" cmpd="sng" algn="ctr">
                       <a:solidFill>
                         <a:srgbClr val="1C1C2E"/>
@@ -10648,7 +10477,7 @@
                     <a:bodyPr/>
                     <a:lstStyle/>
                     <a:p>
-                      <a:pPr indent="0" marL="0">
+                      <a:pPr marL="0" indent="0">
                         <a:buNone/>
                       </a:pPr>
                       <a:r>
@@ -10669,7 +10498,7 @@
                       </a:endParaRPr>
                     </a:p>
                   </a:txBody>
-                  <a:tcPr marL="91440" marR="91440" marT="45720" marB="45720">
+                  <a:tcPr>
                     <a:lnL w="12700" cap="flat" cmpd="sng" algn="ctr">
                       <a:solidFill>
                         <a:srgbClr val="1C1C2E"/>
@@ -10716,7 +10545,7 @@
                     <a:bodyPr/>
                     <a:lstStyle/>
                     <a:p>
-                      <a:pPr indent="0" marL="0">
+                      <a:pPr marL="0" indent="0">
                         <a:buNone/>
                       </a:pPr>
                       <a:r>
@@ -10737,7 +10566,7 @@
                       </a:endParaRPr>
                     </a:p>
                   </a:txBody>
-                  <a:tcPr marL="91440" marR="91440" marT="45720" marB="45720">
+                  <a:tcPr>
                     <a:lnL w="12700" cap="flat" cmpd="sng" algn="ctr">
                       <a:solidFill>
                         <a:srgbClr val="1C1C2E"/>
@@ -10779,6 +10608,11 @@
                     </a:solidFill>
                   </a:tcPr>
                 </a:tc>
+                <a:extLst>
+                  <a:ext uri="{0D108BD9-81ED-4DB2-BD59-A6C34878D82A}">
+                    <a16:rowId xmlns:a16="http://schemas.microsoft.com/office/drawing/2014/main" val="10001"/>
+                  </a:ext>
+                </a:extLst>
               </a:tr>
               <a:tr h="548640">
                 <a:tc>
@@ -10786,7 +10620,7 @@
                     <a:bodyPr/>
                     <a:lstStyle/>
                     <a:p>
-                      <a:pPr indent="0" marL="0">
+                      <a:pPr marL="0" indent="0">
                         <a:buNone/>
                       </a:pPr>
                       <a:r>
@@ -10807,7 +10641,7 @@
                       </a:endParaRPr>
                     </a:p>
                   </a:txBody>
-                  <a:tcPr marL="91440" marR="91440" marT="45720" marB="45720">
+                  <a:tcPr>
                     <a:lnL w="12700" cap="flat" cmpd="sng" algn="ctr">
                       <a:solidFill>
                         <a:srgbClr val="1C1C2E"/>
@@ -10854,7 +10688,7 @@
                     <a:bodyPr/>
                     <a:lstStyle/>
                     <a:p>
-                      <a:pPr indent="0" marL="0">
+                      <a:pPr marL="0" indent="0">
                         <a:buNone/>
                       </a:pPr>
                       <a:r>
@@ -10875,7 +10709,7 @@
                       </a:endParaRPr>
                     </a:p>
                   </a:txBody>
-                  <a:tcPr marL="91440" marR="91440" marT="45720" marB="45720">
+                  <a:tcPr>
                     <a:lnL w="12700" cap="flat" cmpd="sng" algn="ctr">
                       <a:solidFill>
                         <a:srgbClr val="1C1C2E"/>
@@ -10922,7 +10756,7 @@
                     <a:bodyPr/>
                     <a:lstStyle/>
                     <a:p>
-                      <a:pPr indent="0" marL="0">
+                      <a:pPr marL="0" indent="0">
                         <a:buNone/>
                       </a:pPr>
                       <a:r>
@@ -10943,7 +10777,7 @@
                       </a:endParaRPr>
                     </a:p>
                   </a:txBody>
-                  <a:tcPr marL="91440" marR="91440" marT="45720" marB="45720">
+                  <a:tcPr>
                     <a:lnL w="12700" cap="flat" cmpd="sng" algn="ctr">
                       <a:solidFill>
                         <a:srgbClr val="1C1C2E"/>
@@ -10990,7 +10824,7 @@
                     <a:bodyPr/>
                     <a:lstStyle/>
                     <a:p>
-                      <a:pPr indent="0" marL="0">
+                      <a:pPr marL="0" indent="0">
                         <a:buNone/>
                       </a:pPr>
                       <a:r>
@@ -11011,7 +10845,7 @@
                       </a:endParaRPr>
                     </a:p>
                   </a:txBody>
-                  <a:tcPr marL="91440" marR="91440" marT="45720" marB="45720">
+                  <a:tcPr>
                     <a:lnL w="12700" cap="flat" cmpd="sng" algn="ctr">
                       <a:solidFill>
                         <a:srgbClr val="1C1C2E"/>
@@ -11053,6 +10887,11 @@
                     </a:solidFill>
                   </a:tcPr>
                 </a:tc>
+                <a:extLst>
+                  <a:ext uri="{0D108BD9-81ED-4DB2-BD59-A6C34878D82A}">
+                    <a16:rowId xmlns:a16="http://schemas.microsoft.com/office/drawing/2014/main" val="10002"/>
+                  </a:ext>
+                </a:extLst>
               </a:tr>
               <a:tr h="548640">
                 <a:tc>
@@ -11060,7 +10899,7 @@
                     <a:bodyPr/>
                     <a:lstStyle/>
                     <a:p>
-                      <a:pPr indent="0" marL="0">
+                      <a:pPr marL="0" indent="0">
                         <a:buNone/>
                       </a:pPr>
                       <a:r>
@@ -11081,7 +10920,7 @@
                       </a:endParaRPr>
                     </a:p>
                   </a:txBody>
-                  <a:tcPr marL="91440" marR="91440" marT="45720" marB="45720">
+                  <a:tcPr>
                     <a:lnL w="12700" cap="flat" cmpd="sng" algn="ctr">
                       <a:solidFill>
                         <a:srgbClr val="1C1C2E"/>
@@ -11128,7 +10967,7 @@
                     <a:bodyPr/>
                     <a:lstStyle/>
                     <a:p>
-                      <a:pPr indent="0" marL="0">
+                      <a:pPr marL="0" indent="0">
                         <a:buNone/>
                       </a:pPr>
                       <a:r>
@@ -11149,7 +10988,7 @@
                       </a:endParaRPr>
                     </a:p>
                   </a:txBody>
-                  <a:tcPr marL="91440" marR="91440" marT="45720" marB="45720">
+                  <a:tcPr>
                     <a:lnL w="12700" cap="flat" cmpd="sng" algn="ctr">
                       <a:solidFill>
                         <a:srgbClr val="1C1C2E"/>
@@ -11196,7 +11035,7 @@
                     <a:bodyPr/>
                     <a:lstStyle/>
                     <a:p>
-                      <a:pPr indent="0" marL="0">
+                      <a:pPr marL="0" indent="0">
                         <a:buNone/>
                       </a:pPr>
                       <a:r>
@@ -11217,7 +11056,7 @@
                       </a:endParaRPr>
                     </a:p>
                   </a:txBody>
-                  <a:tcPr marL="91440" marR="91440" marT="45720" marB="45720">
+                  <a:tcPr>
                     <a:lnL w="12700" cap="flat" cmpd="sng" algn="ctr">
                       <a:solidFill>
                         <a:srgbClr val="1C1C2E"/>
@@ -11264,7 +11103,7 @@
                     <a:bodyPr/>
                     <a:lstStyle/>
                     <a:p>
-                      <a:pPr indent="0" marL="0">
+                      <a:pPr marL="0" indent="0">
                         <a:buNone/>
                       </a:pPr>
                       <a:r>
@@ -11285,7 +11124,7 @@
                       </a:endParaRPr>
                     </a:p>
                   </a:txBody>
-                  <a:tcPr marL="91440" marR="91440" marT="45720" marB="45720">
+                  <a:tcPr>
                     <a:lnL w="12700" cap="flat" cmpd="sng" algn="ctr">
                       <a:solidFill>
                         <a:srgbClr val="1C1C2E"/>
@@ -11327,6 +11166,11 @@
                     </a:solidFill>
                   </a:tcPr>
                 </a:tc>
+                <a:extLst>
+                  <a:ext uri="{0D108BD9-81ED-4DB2-BD59-A6C34878D82A}">
+                    <a16:rowId xmlns:a16="http://schemas.microsoft.com/office/drawing/2014/main" val="10003"/>
+                  </a:ext>
+                </a:extLst>
               </a:tr>
               <a:tr h="548640">
                 <a:tc>
@@ -11334,7 +11178,7 @@
                     <a:bodyPr/>
                     <a:lstStyle/>
                     <a:p>
-                      <a:pPr indent="0" marL="0">
+                      <a:pPr marL="0" indent="0">
                         <a:buNone/>
                       </a:pPr>
                       <a:r>
@@ -11355,7 +11199,7 @@
                       </a:endParaRPr>
                     </a:p>
                   </a:txBody>
-                  <a:tcPr marL="91440" marR="91440" marT="45720" marB="45720">
+                  <a:tcPr>
                     <a:lnL w="12700" cap="flat" cmpd="sng" algn="ctr">
                       <a:solidFill>
                         <a:srgbClr val="1C1C2E"/>
@@ -11402,7 +11246,7 @@
                     <a:bodyPr/>
                     <a:lstStyle/>
                     <a:p>
-                      <a:pPr indent="0" marL="0">
+                      <a:pPr marL="0" indent="0">
                         <a:buNone/>
                       </a:pPr>
                       <a:r>
@@ -11423,7 +11267,7 @@
                       </a:endParaRPr>
                     </a:p>
                   </a:txBody>
-                  <a:tcPr marL="91440" marR="91440" marT="45720" marB="45720">
+                  <a:tcPr>
                     <a:lnL w="12700" cap="flat" cmpd="sng" algn="ctr">
                       <a:solidFill>
                         <a:srgbClr val="1C1C2E"/>
@@ -11470,7 +11314,7 @@
                     <a:bodyPr/>
                     <a:lstStyle/>
                     <a:p>
-                      <a:pPr indent="0" marL="0">
+                      <a:pPr marL="0" indent="0">
                         <a:buNone/>
                       </a:pPr>
                       <a:r>
@@ -11491,7 +11335,7 @@
                       </a:endParaRPr>
                     </a:p>
                   </a:txBody>
-                  <a:tcPr marL="91440" marR="91440" marT="45720" marB="45720">
+                  <a:tcPr>
                     <a:lnL w="12700" cap="flat" cmpd="sng" algn="ctr">
                       <a:solidFill>
                         <a:srgbClr val="1C1C2E"/>
@@ -11538,7 +11382,7 @@
                     <a:bodyPr/>
                     <a:lstStyle/>
                     <a:p>
-                      <a:pPr indent="0" marL="0">
+                      <a:pPr marL="0" indent="0">
                         <a:buNone/>
                       </a:pPr>
                       <a:r>
@@ -11559,7 +11403,7 @@
                       </a:endParaRPr>
                     </a:p>
                   </a:txBody>
-                  <a:tcPr marL="91440" marR="91440" marT="45720" marB="45720">
+                  <a:tcPr>
                     <a:lnL w="12700" cap="flat" cmpd="sng" algn="ctr">
                       <a:solidFill>
                         <a:srgbClr val="1C1C2E"/>
@@ -11601,6 +11445,11 @@
                     </a:solidFill>
                   </a:tcPr>
                 </a:tc>
+                <a:extLst>
+                  <a:ext uri="{0D108BD9-81ED-4DB2-BD59-A6C34878D82A}">
+                    <a16:rowId xmlns:a16="http://schemas.microsoft.com/office/drawing/2014/main" val="10004"/>
+                  </a:ext>
+                </a:extLst>
               </a:tr>
             </a:tbl>
           </a:graphicData>
@@ -11608,7 +11457,7 @@
       </p:graphicFrame>
       <p:sp>
         <p:nvSpPr>
-          <p:cNvPr id="7" name="Text 4"/>
+          <p:cNvPr id="6" name="Text 4"/>
           <p:cNvSpPr/>
           <p:nvPr/>
         </p:nvSpPr>
@@ -11627,7 +11476,7 @@
           <a:bodyPr wrap="square" rtlCol="0" anchor="ctr"/>
           <a:lstStyle/>
           <a:p>
-            <a:pPr indent="0" marL="0">
+            <a:pPr marL="0" indent="0">
               <a:buNone/>
             </a:pPr>
             <a:r>
@@ -11661,6 +11510,7 @@
         <a:solidFill>
           <a:srgbClr val="0D0D14"/>
         </a:solidFill>
+        <a:effectLst/>
       </p:bgPr>
     </p:bg>
     <p:spTree>
@@ -11698,7 +11548,7 @@
           <a:bodyPr wrap="square" rtlCol="0" anchor="ctr"/>
           <a:lstStyle/>
           <a:p>
-            <a:pPr indent="0" marL="0">
+            <a:pPr marL="0" indent="0">
               <a:buNone/>
             </a:pPr>
             <a:r>
@@ -11757,7 +11607,7 @@
           <a:bodyPr wrap="square" rtlCol="0" anchor="ctr"/>
           <a:lstStyle/>
           <a:p>
-            <a:pPr algn="r" indent="0" marL="0">
+            <a:pPr marL="0" indent="0" algn="r">
               <a:buNone/>
             </a:pPr>
             <a:r>
@@ -11796,7 +11646,7 @@
           <a:bodyPr wrap="square" rtlCol="0" anchor="ctr"/>
           <a:lstStyle/>
           <a:p>
-            <a:pPr indent="0" marL="0">
+            <a:pPr marL="0" indent="0">
               <a:buNone/>
             </a:pPr>
             <a:r>
@@ -11915,7 +11765,7 @@
           <a:bodyPr wrap="square" rtlCol="0" anchor="ctr"/>
           <a:lstStyle/>
           <a:p>
-            <a:pPr algn="ctr" indent="0" marL="0">
+            <a:pPr marL="0" indent="0" algn="ctr">
               <a:buNone/>
             </a:pPr>
             <a:r>
@@ -11954,7 +11804,7 @@
           <a:bodyPr wrap="square" rtlCol="0" anchor="ctr"/>
           <a:lstStyle/>
           <a:p>
-            <a:pPr algn="ctr" indent="0" marL="0">
+            <a:pPr marL="0" indent="0" algn="ctr">
               <a:buNone/>
             </a:pPr>
             <a:r>
@@ -11971,7 +11821,7 @@
             <a:endParaRPr lang="en-US" sz="900" dirty="0"/>
           </a:p>
           <a:p>
-            <a:pPr algn="ctr" indent="0" marL="0">
+            <a:pPr marL="0" indent="0" algn="ctr">
               <a:buNone/>
             </a:pPr>
             <a:r>
@@ -12010,7 +11860,7 @@
           <a:bodyPr wrap="square" rtlCol="0" anchor="ctr"/>
           <a:lstStyle/>
           <a:p>
-            <a:pPr algn="ctr" indent="0" marL="0">
+            <a:pPr marL="0" indent="0" algn="ctr">
               <a:buNone/>
             </a:pPr>
             <a:r>
@@ -12027,7 +11877,7 @@
             <a:endParaRPr lang="en-US" sz="900" dirty="0"/>
           </a:p>
           <a:p>
-            <a:pPr algn="ctr" indent="0" marL="0">
+            <a:pPr marL="0" indent="0" algn="ctr">
               <a:buNone/>
             </a:pPr>
             <a:r>
@@ -12066,7 +11916,7 @@
           <a:bodyPr wrap="square" rtlCol="0" anchor="ctr"/>
           <a:lstStyle/>
           <a:p>
-            <a:pPr algn="ctr" indent="0" marL="0">
+            <a:pPr marL="0" indent="0" algn="ctr">
               <a:buNone/>
             </a:pPr>
             <a:r>
@@ -12105,7 +11955,7 @@
           <a:bodyPr wrap="square" rtlCol="0" anchor="ctr"/>
           <a:lstStyle/>
           <a:p>
-            <a:pPr algn="ctr" indent="0" marL="0">
+            <a:pPr marL="0" indent="0" algn="ctr">
               <a:buNone/>
             </a:pPr>
             <a:r>
@@ -12144,7 +11994,7 @@
           <a:bodyPr wrap="square" rtlCol="0" anchor="ctr"/>
           <a:lstStyle/>
           <a:p>
-            <a:pPr algn="ctr" indent="0" marL="0">
+            <a:pPr marL="0" indent="0" algn="ctr">
               <a:buNone/>
             </a:pPr>
             <a:r>
@@ -12183,7 +12033,7 @@
           <a:bodyPr wrap="square" rtlCol="0" anchor="ctr"/>
           <a:lstStyle/>
           <a:p>
-            <a:pPr algn="ctr" indent="0" marL="0">
+            <a:pPr marL="0" indent="0" algn="ctr">
               <a:buNone/>
             </a:pPr>
             <a:r>
@@ -12222,7 +12072,7 @@
           <a:bodyPr wrap="square" rtlCol="0" anchor="ctr"/>
           <a:lstStyle/>
           <a:p>
-            <a:pPr algn="ctr" indent="0" marL="0">
+            <a:pPr marL="0" indent="0" algn="ctr">
               <a:buNone/>
             </a:pPr>
             <a:r>
@@ -12261,7 +12111,7 @@
           <a:bodyPr wrap="square" rtlCol="0" anchor="ctr"/>
           <a:lstStyle/>
           <a:p>
-            <a:pPr algn="ctr" indent="0" marL="0">
+            <a:pPr marL="0" indent="0" algn="ctr">
               <a:buNone/>
             </a:pPr>
             <a:r>
@@ -12300,7 +12150,7 @@
           <a:bodyPr wrap="square" rtlCol="0" anchor="ctr"/>
           <a:lstStyle/>
           <a:p>
-            <a:pPr algn="ctr" indent="0" marL="0">
+            <a:pPr marL="0" indent="0" algn="ctr">
               <a:buNone/>
             </a:pPr>
             <a:r>
@@ -12317,7 +12167,7 @@
             <a:endParaRPr lang="en-US" sz="1000" dirty="0"/>
           </a:p>
           <a:p>
-            <a:pPr algn="ctr" indent="0" marL="0">
+            <a:pPr marL="0" indent="0" algn="ctr">
               <a:buNone/>
             </a:pPr>
             <a:r>
@@ -12356,7 +12206,7 @@
           <a:bodyPr wrap="square" rtlCol="0" anchor="ctr"/>
           <a:lstStyle/>
           <a:p>
-            <a:pPr algn="ctr" indent="0" marL="0">
+            <a:pPr marL="0" indent="0" algn="ctr">
               <a:buNone/>
             </a:pPr>
             <a:r>
@@ -12390,6 +12240,7 @@
         <a:solidFill>
           <a:srgbClr val="0D0D14"/>
         </a:solidFill>
+        <a:effectLst/>
       </p:bgPr>
     </p:bg>
     <p:spTree>
@@ -12427,7 +12278,7 @@
           <a:bodyPr wrap="square" rtlCol="0" anchor="ctr"/>
           <a:lstStyle/>
           <a:p>
-            <a:pPr indent="0" marL="0">
+            <a:pPr marL="0" indent="0">
               <a:buNone/>
             </a:pPr>
             <a:r>
@@ -12486,7 +12337,7 @@
           <a:bodyPr wrap="square" rtlCol="0" anchor="ctr"/>
           <a:lstStyle/>
           <a:p>
-            <a:pPr algn="r" indent="0" marL="0">
+            <a:pPr marL="0" indent="0" algn="r">
               <a:buNone/>
             </a:pPr>
             <a:r>
@@ -12552,7 +12403,7 @@
           <a:bodyPr wrap="square" rtlCol="0" anchor="ctr"/>
           <a:lstStyle/>
           <a:p>
-            <a:pPr indent="0" marL="0">
+            <a:pPr marL="0" indent="0">
               <a:buNone/>
             </a:pPr>
             <a:r>
@@ -12591,7 +12442,7 @@
           <a:bodyPr wrap="square" rtlCol="0" anchor="ctr"/>
           <a:lstStyle/>
           <a:p>
-            <a:pPr indent="0" marL="0">
+            <a:pPr marL="0" indent="0">
               <a:buNone/>
             </a:pPr>
             <a:r>
@@ -12767,7 +12618,7 @@
           <a:bodyPr wrap="square" rtlCol="0" anchor="ctr"/>
           <a:lstStyle/>
           <a:p>
-            <a:pPr indent="0" marL="0">
+            <a:pPr marL="0" indent="0">
               <a:buNone/>
             </a:pPr>
             <a:r>
@@ -12806,7 +12657,7 @@
           <a:bodyPr wrap="square" rtlCol="0" anchor="ctr"/>
           <a:lstStyle/>
           <a:p>
-            <a:pPr indent="0" marL="0">
+            <a:pPr marL="0" indent="0">
               <a:buNone/>
             </a:pPr>
             <a:r>
@@ -12982,7 +12833,7 @@
           <a:bodyPr wrap="square" rtlCol="0" anchor="ctr"/>
           <a:lstStyle/>
           <a:p>
-            <a:pPr indent="0" marL="0">
+            <a:pPr marL="0" indent="0">
               <a:buNone/>
             </a:pPr>
             <a:r>
@@ -13021,7 +12872,7 @@
           <a:bodyPr wrap="square" rtlCol="0" anchor="ctr"/>
           <a:lstStyle/>
           <a:p>
-            <a:pPr indent="0" marL="0">
+            <a:pPr marL="0" indent="0">
               <a:buNone/>
             </a:pPr>
             <a:r>
@@ -13165,6 +13016,7 @@
         <a:solidFill>
           <a:srgbClr val="0D0D14"/>
         </a:solidFill>
+        <a:effectLst/>
       </p:bgPr>
     </p:bg>
     <p:spTree>
@@ -13202,7 +13054,7 @@
           <a:bodyPr wrap="square" rtlCol="0" anchor="ctr"/>
           <a:lstStyle/>
           <a:p>
-            <a:pPr indent="0" marL="0">
+            <a:pPr marL="0" indent="0">
               <a:buNone/>
             </a:pPr>
             <a:r>
@@ -13261,7 +13113,7 @@
           <a:bodyPr wrap="square" rtlCol="0" anchor="ctr"/>
           <a:lstStyle/>
           <a:p>
-            <a:pPr algn="r" indent="0" marL="0">
+            <a:pPr marL="0" indent="0" algn="r">
               <a:buNone/>
             </a:pPr>
             <a:r>
@@ -13300,7 +13152,7 @@
           <a:bodyPr wrap="square" rtlCol="0" anchor="ctr"/>
           <a:lstStyle/>
           <a:p>
-            <a:pPr indent="0" marL="0">
+            <a:pPr marL="0" indent="0">
               <a:buNone/>
             </a:pPr>
             <a:r>
@@ -13366,7 +13218,7 @@
           <a:bodyPr wrap="square" rtlCol="0" anchor="ctr"/>
           <a:lstStyle/>
           <a:p>
-            <a:pPr algn="ctr" indent="0" marL="0">
+            <a:pPr marL="0" indent="0" algn="ctr">
               <a:buNone/>
             </a:pPr>
             <a:r>
@@ -13405,7 +13257,7 @@
           <a:bodyPr wrap="square" rtlCol="0" anchor="ctr"/>
           <a:lstStyle/>
           <a:p>
-            <a:pPr algn="ctr" indent="0" marL="0">
+            <a:pPr marL="0" indent="0" algn="ctr">
               <a:buNone/>
             </a:pPr>
             <a:r>
@@ -13444,7 +13296,7 @@
           <a:bodyPr wrap="square" rtlCol="0" anchor="ctr"/>
           <a:lstStyle/>
           <a:p>
-            <a:pPr algn="ctr" indent="0" marL="0">
+            <a:pPr marL="0" indent="0" algn="ctr">
               <a:buNone/>
             </a:pPr>
             <a:r>
@@ -13510,7 +13362,7 @@
           <a:bodyPr wrap="square" rtlCol="0" anchor="ctr"/>
           <a:lstStyle/>
           <a:p>
-            <a:pPr algn="ctr" indent="0" marL="0">
+            <a:pPr marL="0" indent="0" algn="ctr">
               <a:buNone/>
             </a:pPr>
             <a:r>
@@ -13549,7 +13401,7 @@
           <a:bodyPr wrap="square" rtlCol="0" anchor="ctr"/>
           <a:lstStyle/>
           <a:p>
-            <a:pPr algn="ctr" indent="0" marL="0">
+            <a:pPr marL="0" indent="0" algn="ctr">
               <a:buNone/>
             </a:pPr>
             <a:r>
@@ -13588,7 +13440,7 @@
           <a:bodyPr wrap="square" rtlCol="0" anchor="ctr"/>
           <a:lstStyle/>
           <a:p>
-            <a:pPr algn="ctr" indent="0" marL="0">
+            <a:pPr marL="0" indent="0" algn="ctr">
               <a:buNone/>
             </a:pPr>
             <a:r>
@@ -13654,7 +13506,7 @@
           <a:bodyPr wrap="square" rtlCol="0" anchor="ctr"/>
           <a:lstStyle/>
           <a:p>
-            <a:pPr algn="ctr" indent="0" marL="0">
+            <a:pPr marL="0" indent="0" algn="ctr">
               <a:buNone/>
             </a:pPr>
             <a:r>
@@ -13693,7 +13545,7 @@
           <a:bodyPr wrap="square" rtlCol="0" anchor="ctr"/>
           <a:lstStyle/>
           <a:p>
-            <a:pPr algn="ctr" indent="0" marL="0">
+            <a:pPr marL="0" indent="0" algn="ctr">
               <a:buNone/>
             </a:pPr>
             <a:r>
@@ -13732,7 +13584,7 @@
           <a:bodyPr wrap="square" rtlCol="0" anchor="ctr"/>
           <a:lstStyle/>
           <a:p>
-            <a:pPr algn="ctr" indent="0" marL="0">
+            <a:pPr marL="0" indent="0" algn="ctr">
               <a:buNone/>
             </a:pPr>
             <a:r>
@@ -13798,7 +13650,7 @@
           <a:bodyPr wrap="square" rtlCol="0" anchor="ctr"/>
           <a:lstStyle/>
           <a:p>
-            <a:pPr algn="ctr" indent="0" marL="0">
+            <a:pPr marL="0" indent="0" algn="ctr">
               <a:buNone/>
             </a:pPr>
             <a:r>
@@ -13837,7 +13689,7 @@
           <a:bodyPr wrap="square" rtlCol="0" anchor="ctr"/>
           <a:lstStyle/>
           <a:p>
-            <a:pPr algn="ctr" indent="0" marL="0">
+            <a:pPr marL="0" indent="0" algn="ctr">
               <a:buNone/>
             </a:pPr>
             <a:r>
@@ -13876,7 +13728,7 @@
           <a:bodyPr wrap="square" rtlCol="0" anchor="ctr"/>
           <a:lstStyle/>
           <a:p>
-            <a:pPr algn="ctr" indent="0" marL="0">
+            <a:pPr marL="0" indent="0" algn="ctr">
               <a:buNone/>
             </a:pPr>
             <a:r>
@@ -13915,7 +13767,7 @@
           <a:bodyPr wrap="square" rtlCol="0" anchor="ctr"/>
           <a:lstStyle/>
           <a:p>
-            <a:pPr indent="0" marL="0">
+            <a:pPr marL="0" indent="0">
               <a:buNone/>
             </a:pPr>
             <a:r>
@@ -14344,4 +14196,299 @@
     </a:ext>
   </a:extLst>
 </a:theme>
+</file>
+
+<file path=ppt/theme/theme2.xml><?xml version="1.0" encoding="utf-8"?>
+<a:theme xmlns:a="http://schemas.openxmlformats.org/drawingml/2006/main" name="Office Theme">
+  <a:themeElements>
+    <a:clrScheme name="Office">
+      <a:dk1>
+        <a:sysClr val="windowText" lastClr="000000"/>
+      </a:dk1>
+      <a:lt1>
+        <a:sysClr val="window" lastClr="FFFFFF"/>
+      </a:lt1>
+      <a:dk2>
+        <a:srgbClr val="44546A"/>
+      </a:dk2>
+      <a:lt2>
+        <a:srgbClr val="E7E6E6"/>
+      </a:lt2>
+      <a:accent1>
+        <a:srgbClr val="4472C4"/>
+      </a:accent1>
+      <a:accent2>
+        <a:srgbClr val="ED7D31"/>
+      </a:accent2>
+      <a:accent3>
+        <a:srgbClr val="A5A5A5"/>
+      </a:accent3>
+      <a:accent4>
+        <a:srgbClr val="FFC000"/>
+      </a:accent4>
+      <a:accent5>
+        <a:srgbClr val="5B9BD5"/>
+      </a:accent5>
+      <a:accent6>
+        <a:srgbClr val="70AD47"/>
+      </a:accent6>
+      <a:hlink>
+        <a:srgbClr val="0563C1"/>
+      </a:hlink>
+      <a:folHlink>
+        <a:srgbClr val="954F72"/>
+      </a:folHlink>
+    </a:clrScheme>
+    <a:fontScheme name="Office">
+      <a:majorFont>
+        <a:latin typeface="Calibri Light" panose="020F0302020204030204"/>
+        <a:ea typeface=""/>
+        <a:cs typeface=""/>
+        <a:font script="Jpan" typeface="游ゴシック Light"/>
+        <a:font script="Hang" typeface="맑은 고딕"/>
+        <a:font script="Hans" typeface="等线 Light"/>
+        <a:font script="Hant" typeface="新細明體"/>
+        <a:font script="Arab" typeface="Times New Roman"/>
+        <a:font script="Hebr" typeface="Times New Roman"/>
+        <a:font script="Thai" typeface="Angsana New"/>
+        <a:font script="Ethi" typeface="Nyala"/>
+        <a:font script="Beng" typeface="Vrinda"/>
+        <a:font script="Gujr" typeface="Shruti"/>
+        <a:font script="Khmr" typeface="MoolBoran"/>
+        <a:font script="Knda" typeface="Tunga"/>
+        <a:font script="Guru" typeface="Raavi"/>
+        <a:font script="Cans" typeface="Euphemia"/>
+        <a:font script="Cher" typeface="Plantagenet Cherokee"/>
+        <a:font script="Yiii" typeface="Microsoft Yi Baiti"/>
+        <a:font script="Tibt" typeface="Microsoft Himalaya"/>
+        <a:font script="Thaa" typeface="MV Boli"/>
+        <a:font script="Deva" typeface="Mangal"/>
+        <a:font script="Telu" typeface="Gautami"/>
+        <a:font script="Taml" typeface="Latha"/>
+        <a:font script="Syrc" typeface="Estrangelo Edessa"/>
+        <a:font script="Orya" typeface="Kalinga"/>
+        <a:font script="Mlym" typeface="Kartika"/>
+        <a:font script="Laoo" typeface="DokChampa"/>
+        <a:font script="Sinh" typeface="Iskoola Pota"/>
+        <a:font script="Mong" typeface="Mongolian Baiti"/>
+        <a:font script="Viet" typeface="Times New Roman"/>
+        <a:font script="Uigh" typeface="Microsoft Uighur"/>
+        <a:font script="Geor" typeface="Sylfaen"/>
+        <a:font script="Armn" typeface="Arial"/>
+        <a:font script="Bugi" typeface="Leelawadee UI"/>
+        <a:font script="Bopo" typeface="Microsoft JhengHei"/>
+        <a:font script="Java" typeface="Javanese Text"/>
+        <a:font script="Lisu" typeface="Segoe UI"/>
+        <a:font script="Mymr" typeface="Myanmar Text"/>
+        <a:font script="Nkoo" typeface="Ebrima"/>
+        <a:font script="Olck" typeface="Nirmala UI"/>
+        <a:font script="Osma" typeface="Ebrima"/>
+        <a:font script="Phag" typeface="Phagspa"/>
+        <a:font script="Syrn" typeface="Estrangelo Edessa"/>
+        <a:font script="Syrj" typeface="Estrangelo Edessa"/>
+        <a:font script="Syre" typeface="Estrangelo Edessa"/>
+        <a:font script="Sora" typeface="Nirmala UI"/>
+        <a:font script="Tale" typeface="Microsoft Tai Le"/>
+        <a:font script="Talu" typeface="Microsoft New Tai Lue"/>
+        <a:font script="Tfng" typeface="Ebrima"/>
+      </a:majorFont>
+      <a:minorFont>
+        <a:latin typeface="Calibri" panose="020F0502020204030204"/>
+        <a:ea typeface=""/>
+        <a:cs typeface=""/>
+        <a:font script="Jpan" typeface="游ゴシック"/>
+        <a:font script="Hang" typeface="맑은 고딕"/>
+        <a:font script="Hans" typeface="等线"/>
+        <a:font script="Hant" typeface="新細明體"/>
+        <a:font script="Arab" typeface="Arial"/>
+        <a:font script="Hebr" typeface="Arial"/>
+        <a:font script="Thai" typeface="Cordia New"/>
+        <a:font script="Ethi" typeface="Nyala"/>
+        <a:font script="Beng" typeface="Vrinda"/>
+        <a:font script="Gujr" typeface="Shruti"/>
+        <a:font script="Khmr" typeface="DaunPenh"/>
+        <a:font script="Knda" typeface="Tunga"/>
+        <a:font script="Guru" typeface="Raavi"/>
+        <a:font script="Cans" typeface="Euphemia"/>
+        <a:font script="Cher" typeface="Plantagenet Cherokee"/>
+        <a:font script="Yiii" typeface="Microsoft Yi Baiti"/>
+        <a:font script="Tibt" typeface="Microsoft Himalaya"/>
+        <a:font script="Thaa" typeface="MV Boli"/>
+        <a:font script="Deva" typeface="Mangal"/>
+        <a:font script="Telu" typeface="Gautami"/>
+        <a:font script="Taml" typeface="Latha"/>
+        <a:font script="Syrc" typeface="Estrangelo Edessa"/>
+        <a:font script="Orya" typeface="Kalinga"/>
+        <a:font script="Mlym" typeface="Kartika"/>
+        <a:font script="Laoo" typeface="DokChampa"/>
+        <a:font script="Sinh" typeface="Iskoola Pota"/>
+        <a:font script="Mong" typeface="Mongolian Baiti"/>
+        <a:font script="Viet" typeface="Arial"/>
+        <a:font script="Uigh" typeface="Microsoft Uighur"/>
+        <a:font script="Geor" typeface="Sylfaen"/>
+        <a:font script="Armn" typeface="Arial"/>
+        <a:font script="Bugi" typeface="Leelawadee UI"/>
+        <a:font script="Bopo" typeface="Microsoft JhengHei"/>
+        <a:font script="Java" typeface="Javanese Text"/>
+        <a:font script="Lisu" typeface="Segoe UI"/>
+        <a:font script="Mymr" typeface="Myanmar Text"/>
+        <a:font script="Nkoo" typeface="Ebrima"/>
+        <a:font script="Olck" typeface="Nirmala UI"/>
+        <a:font script="Osma" typeface="Ebrima"/>
+        <a:font script="Phag" typeface="Phagspa"/>
+        <a:font script="Syrn" typeface="Estrangelo Edessa"/>
+        <a:font script="Syrj" typeface="Estrangelo Edessa"/>
+        <a:font script="Syre" typeface="Estrangelo Edessa"/>
+        <a:font script="Sora" typeface="Nirmala UI"/>
+        <a:font script="Tale" typeface="Microsoft Tai Le"/>
+        <a:font script="Talu" typeface="Microsoft New Tai Lue"/>
+        <a:font script="Tfng" typeface="Ebrima"/>
+      </a:minorFont>
+    </a:fontScheme>
+    <a:fmtScheme name="Office">
+      <a:fillStyleLst>
+        <a:solidFill>
+          <a:schemeClr val="phClr"/>
+        </a:solidFill>
+        <a:gradFill rotWithShape="1">
+          <a:gsLst>
+            <a:gs pos="0">
+              <a:schemeClr val="phClr">
+                <a:lumMod val="110000"/>
+                <a:satMod val="105000"/>
+                <a:tint val="67000"/>
+              </a:schemeClr>
+            </a:gs>
+            <a:gs pos="50000">
+              <a:schemeClr val="phClr">
+                <a:lumMod val="105000"/>
+                <a:satMod val="103000"/>
+                <a:tint val="73000"/>
+              </a:schemeClr>
+            </a:gs>
+            <a:gs pos="100000">
+              <a:schemeClr val="phClr">
+                <a:lumMod val="105000"/>
+                <a:satMod val="109000"/>
+                <a:tint val="81000"/>
+              </a:schemeClr>
+            </a:gs>
+          </a:gsLst>
+          <a:lin ang="5400000" scaled="0"/>
+        </a:gradFill>
+        <a:gradFill rotWithShape="1">
+          <a:gsLst>
+            <a:gs pos="0">
+              <a:schemeClr val="phClr">
+                <a:satMod val="103000"/>
+                <a:lumMod val="102000"/>
+                <a:tint val="94000"/>
+              </a:schemeClr>
+            </a:gs>
+            <a:gs pos="50000">
+              <a:schemeClr val="phClr">
+                <a:satMod val="110000"/>
+                <a:lumMod val="100000"/>
+                <a:shade val="100000"/>
+              </a:schemeClr>
+            </a:gs>
+            <a:gs pos="100000">
+              <a:schemeClr val="phClr">
+                <a:lumMod val="99000"/>
+                <a:satMod val="120000"/>
+                <a:shade val="78000"/>
+              </a:schemeClr>
+            </a:gs>
+          </a:gsLst>
+          <a:lin ang="5400000" scaled="0"/>
+        </a:gradFill>
+      </a:fillStyleLst>
+      <a:lnStyleLst>
+        <a:ln w="6350" cap="flat" cmpd="sng" algn="ctr">
+          <a:solidFill>
+            <a:schemeClr val="phClr"/>
+          </a:solidFill>
+          <a:prstDash val="solid"/>
+          <a:miter lim="800000"/>
+        </a:ln>
+        <a:ln w="12700" cap="flat" cmpd="sng" algn="ctr">
+          <a:solidFill>
+            <a:schemeClr val="phClr"/>
+          </a:solidFill>
+          <a:prstDash val="solid"/>
+          <a:miter lim="800000"/>
+        </a:ln>
+        <a:ln w="19050" cap="flat" cmpd="sng" algn="ctr">
+          <a:solidFill>
+            <a:schemeClr val="phClr"/>
+          </a:solidFill>
+          <a:prstDash val="solid"/>
+          <a:miter lim="800000"/>
+        </a:ln>
+      </a:lnStyleLst>
+      <a:effectStyleLst>
+        <a:effectStyle>
+          <a:effectLst/>
+        </a:effectStyle>
+        <a:effectStyle>
+          <a:effectLst/>
+        </a:effectStyle>
+        <a:effectStyle>
+          <a:effectLst>
+            <a:outerShdw blurRad="57150" dist="19050" dir="5400000" algn="ctr" rotWithShape="0">
+              <a:srgbClr val="000000">
+                <a:alpha val="63000"/>
+              </a:srgbClr>
+            </a:outerShdw>
+          </a:effectLst>
+        </a:effectStyle>
+      </a:effectStyleLst>
+      <a:bgFillStyleLst>
+        <a:solidFill>
+          <a:schemeClr val="phClr"/>
+        </a:solidFill>
+        <a:solidFill>
+          <a:schemeClr val="phClr">
+            <a:tint val="95000"/>
+            <a:satMod val="170000"/>
+          </a:schemeClr>
+        </a:solidFill>
+        <a:gradFill rotWithShape="1">
+          <a:gsLst>
+            <a:gs pos="0">
+              <a:schemeClr val="phClr">
+                <a:tint val="93000"/>
+                <a:satMod val="150000"/>
+                <a:shade val="98000"/>
+                <a:lumMod val="102000"/>
+              </a:schemeClr>
+            </a:gs>
+            <a:gs pos="50000">
+              <a:schemeClr val="phClr">
+                <a:tint val="98000"/>
+                <a:satMod val="130000"/>
+                <a:shade val="90000"/>
+                <a:lumMod val="103000"/>
+              </a:schemeClr>
+            </a:gs>
+            <a:gs pos="100000">
+              <a:schemeClr val="phClr">
+                <a:shade val="63000"/>
+                <a:satMod val="120000"/>
+              </a:schemeClr>
+            </a:gs>
+          </a:gsLst>
+          <a:lin ang="5400000" scaled="0"/>
+        </a:gradFill>
+      </a:bgFillStyleLst>
+    </a:fmtScheme>
+  </a:themeElements>
+  <a:objectDefaults/>
+  <a:extraClrSchemeLst/>
+  <a:extLst>
+    <a:ext uri="{05A4C25C-085E-4340-85A3-A5531E510DB2}">
+      <thm15:themeFamily xmlns:thm15="http://schemas.microsoft.com/office/thememl/2012/main" name="Office Theme" id="{62F939B6-93AF-4DB8-9C6B-D6C7DFDC589F}" vid="{4A3C46E8-61CC-4603-A589-7422A47A8E4A}"/>
+    </a:ext>
+  </a:extLst>
+</a:theme>
 </file>